--- a/week_14/week_14_polyglot_incident.pptx
+++ b/week_14/week_14_polyglot_incident.pptx
@@ -38,6 +38,7 @@
     <p:sldId xmlns:r="http://schemas.openxmlformats.org/officeDocument/2006/relationships" id="283" r:id="Rf7df5ececcdc4d58"/>
     <p:sldId xmlns:r="http://schemas.openxmlformats.org/officeDocument/2006/relationships" id="284" r:id="Rddf5828b47bd4d87"/>
     <p:sldId xmlns:r="http://schemas.openxmlformats.org/officeDocument/2006/relationships" id="285" r:id="Rcad973d172004225"/>
+    <p:sldId xmlns:ns0="http://schemas.openxmlformats.org/officeDocument/2006/relationships" id="286" ns0:id="rId36"/>
   </p:sldIdLst>
   <p:sldSz cx="12192000" cy="6858000"/>
   <p:notesSz cx="6858000" cy="9144000"/>
@@ -3257,6 +3258,76 @@
   </p:cSld>
   <p:clrMapOvr>
     <a:masterClrMapping xmlns:a="http://schemas.openxmlformats.org/drawingml/2006/main"/>
+  </p:clrMapOvr>
+</p:notes>
+</file>
+
+<file path=ppt/notesSlides/notesSlide31.xml><?xml version="1.0" encoding="utf-8"?>
+<p:notes xmlns:a="http://schemas.openxmlformats.org/drawingml/2006/main" xmlns:p="http://schemas.openxmlformats.org/presentationml/2006/main" xmlns:r="http://schemas.openxmlformats.org/officeDocument/2006/relationships">
+  <p:cSld>
+    <p:spTree>
+      <p:nvGrpSpPr>
+        <p:cNvPr id="1" name=""/>
+        <p:cNvGrpSpPr/>
+        <p:nvPr/>
+      </p:nvGrpSpPr>
+      <p:grpSpPr>
+        <a:xfrm>
+          <a:off x="0" y="0"/>
+          <a:ext cx="0" cy="0"/>
+          <a:chOff x="0" y="0"/>
+          <a:chExt cx="0" cy="0"/>
+        </a:xfrm>
+      </p:grpSpPr>
+      <p:sp>
+        <p:nvSpPr>
+          <p:cNvPr id="2" name="Slide Image Placeholder 1"/>
+          <p:cNvSpPr>
+            <a:spLocks noGrp="1"/>
+          </p:cNvSpPr>
+          <p:nvPr>
+            <p:ph type="sldImg" idx="2"/>
+          </p:nvPr>
+        </p:nvSpPr>
+        <p:spPr/>
+      </p:sp>
+      <p:sp>
+        <p:nvSpPr>
+          <p:cNvPr id="3" name="Notes Placeholder 2"/>
+          <p:cNvSpPr>
+            <a:spLocks noGrp="1"/>
+          </p:cNvSpPr>
+          <p:nvPr>
+            <p:ph type="body" idx="3" sz="quarter"/>
+          </p:nvPr>
+        </p:nvSpPr>
+        <p:spPr/>
+        <p:txBody>
+          <a:bodyPr/>
+          <a:lstStyle/>
+          <a:p>
+            <a:r>
+              <a:t>These short animations go with this week's reading. Students can watch them before class to preview the mechanisms, or afterwards to review: Polyglot persistence: one owner per fact (1:30); Keeping two databases consistent: outbox and version guard (1:42); Triage a cross-database incident (1:24). Each video is silent with on-screen captions and a subtitle file, and is linked from the Week 14 README. The diagrams are schematic illustrations, not benchmarks.</a:t>
+            </a:r>
+          </a:p>
+        </p:txBody>
+      </p:sp>
+      <p:sp>
+        <p:nvSpPr>
+          <p:cNvPr id="4" name="Slide Number Placeholder 3"/>
+          <p:cNvSpPr>
+            <a:spLocks noGrp="1"/>
+          </p:cNvSpPr>
+          <p:nvPr>
+            <p:ph type="sldNum" idx="5" sz="quarter"/>
+          </p:nvPr>
+        </p:nvSpPr>
+        <p:spPr/>
+      </p:sp>
+    </p:spTree>
+  </p:cSld>
+  <p:clrMapOvr>
+    <a:masterClrMapping/>
   </p:clrMapOvr>
 </p:notes>
 </file>
@@ -17426,6 +17497,451 @@
 </p:sld>
 </file>
 
+<file path=ppt/slides/slide31.xml><?xml version="1.0" encoding="utf-8"?>
+<p:sld xmlns:a="http://schemas.openxmlformats.org/drawingml/2006/main" xmlns:p="http://schemas.openxmlformats.org/presentationml/2006/main" xmlns:r="http://schemas.openxmlformats.org/officeDocument/2006/relationships">
+  <p:cSld>
+    <p:bg>
+      <p:bgPr>
+        <a:solidFill>
+          <a:srgbClr val="FCFCFA"/>
+        </a:solidFill>
+        <a:effectLst/>
+      </p:bgPr>
+    </p:bg>
+    <p:spTree>
+      <p:nvGrpSpPr>
+        <p:cNvPr id="1" name=""/>
+        <p:cNvGrpSpPr/>
+        <p:nvPr/>
+      </p:nvGrpSpPr>
+      <p:grpSpPr/>
+      <p:sp>
+        <p:nvSpPr>
+          <p:cNvPr id="2" name="cst4714-videos"/>
+          <p:cNvSpPr txBox="1"/>
+          <p:nvPr/>
+        </p:nvSpPr>
+        <p:spPr>
+          <a:xfrm>
+            <a:off x="0" y="0"/>
+            <a:ext cx="10" cy="10"/>
+          </a:xfrm>
+          <a:prstGeom prst="rect">
+            <a:avLst/>
+          </a:prstGeom>
+          <a:noFill/>
+        </p:spPr>
+        <p:txBody>
+          <a:bodyPr wrap="square" lIns="0" rIns="0" tIns="0" bIns="0" anchor="t">
+            <a:spAutoFit/>
+          </a:bodyPr>
+          <a:lstStyle/>
+          <a:p>
+            <a:pPr algn="l"/>
+            <a:r>
+              <a:rPr sz="1800" b="0">
+                <a:solidFill>
+                  <a:srgbClr val="111827"/>
+                </a:solidFill>
+                <a:latin typeface="Helvetica Neue"/>
+              </a:rPr>
+              <a:t/>
+            </a:r>
+          </a:p>
+        </p:txBody>
+      </p:sp>
+      <p:sp>
+        <p:nvSpPr>
+          <p:cNvPr id="3" name="eyebrow"/>
+          <p:cNvSpPr txBox="1"/>
+          <p:nvPr/>
+        </p:nvSpPr>
+        <p:spPr>
+          <a:xfrm>
+            <a:off x="609600" y="295275"/>
+            <a:ext cx="5715000" cy="228600"/>
+          </a:xfrm>
+          <a:prstGeom prst="rect">
+            <a:avLst/>
+          </a:prstGeom>
+          <a:noFill/>
+        </p:spPr>
+        <p:txBody>
+          <a:bodyPr wrap="square" lIns="0" rIns="0" tIns="0" bIns="0" anchor="t">
+            <a:spAutoFit/>
+          </a:bodyPr>
+          <a:lstStyle/>
+          <a:p>
+            <a:pPr algn="l"/>
+            <a:r>
+              <a:rPr sz="1400" b="1">
+                <a:solidFill>
+                  <a:srgbClr val="BF3E05"/>
+                </a:solidFill>
+                <a:latin typeface="Helvetica Neue"/>
+              </a:rPr>
+              <a:t>WEEK 14  /  CST4714</a:t>
+            </a:r>
+          </a:p>
+        </p:txBody>
+      </p:sp>
+      <p:sp>
+        <p:nvSpPr>
+          <p:cNvPr id="4" name="slide-title"/>
+          <p:cNvSpPr txBox="1"/>
+          <p:nvPr/>
+        </p:nvSpPr>
+        <p:spPr>
+          <a:xfrm>
+            <a:off x="609600" y="619125"/>
+            <a:ext cx="10972800" cy="628650"/>
+          </a:xfrm>
+          <a:prstGeom prst="rect">
+            <a:avLst/>
+          </a:prstGeom>
+          <a:noFill/>
+        </p:spPr>
+        <p:txBody>
+          <a:bodyPr wrap="square" lIns="0" rIns="0" tIns="0" bIns="0" anchor="t">
+            <a:spAutoFit/>
+          </a:bodyPr>
+          <a:lstStyle/>
+          <a:p>
+            <a:pPr algn="l"/>
+            <a:r>
+              <a:rPr sz="3600" b="1">
+                <a:solidFill>
+                  <a:srgbClr val="111827"/>
+                </a:solidFill>
+                <a:latin typeface="Helvetica Neue"/>
+              </a:rPr>
+              <a:t>This week's videos</a:t>
+            </a:r>
+          </a:p>
+        </p:txBody>
+      </p:sp>
+      <p:sp>
+        <p:nvSpPr>
+          <p:cNvPr id="5" name="Rectangle 4"/>
+          <p:cNvSpPr/>
+          <p:nvPr/>
+        </p:nvSpPr>
+        <p:spPr>
+          <a:xfrm>
+            <a:off x="609600" y="1295400"/>
+            <a:ext cx="10972800" cy="9525"/>
+          </a:xfrm>
+          <a:prstGeom prst="rect">
+            <a:avLst/>
+          </a:prstGeom>
+          <a:solidFill>
+            <a:srgbClr val="CBD5E1"/>
+          </a:solidFill>
+          <a:ln>
+            <a:noFill/>
+          </a:ln>
+        </p:spPr>
+        <p:style>
+          <a:lnRef idx="1">
+            <a:schemeClr val="accent1"/>
+          </a:lnRef>
+          <a:fillRef idx="3">
+            <a:schemeClr val="accent1"/>
+          </a:fillRef>
+          <a:effectRef idx="2">
+            <a:schemeClr val="accent1"/>
+          </a:effectRef>
+          <a:fontRef idx="minor">
+            <a:schemeClr val="lt1"/>
+          </a:fontRef>
+        </p:style>
+        <p:txBody>
+          <a:bodyPr rtlCol="0" anchor="ctr"/>
+          <a:lstStyle/>
+          <a:p>
+            <a:pPr algn="ctr"/>
+          </a:p>
+        </p:txBody>
+      </p:sp>
+      <p:sp>
+        <p:nvSpPr>
+          <p:cNvPr id="6" name="slide-number"/>
+          <p:cNvSpPr txBox="1"/>
+          <p:nvPr/>
+        </p:nvSpPr>
+        <p:spPr>
+          <a:xfrm>
+            <a:off x="11125200" y="6467475"/>
+            <a:ext cx="457200" cy="190500"/>
+          </a:xfrm>
+          <a:prstGeom prst="rect">
+            <a:avLst/>
+          </a:prstGeom>
+          <a:noFill/>
+        </p:spPr>
+        <p:txBody>
+          <a:bodyPr wrap="square" lIns="0" rIns="0" tIns="0" bIns="0" anchor="t">
+            <a:spAutoFit/>
+          </a:bodyPr>
+          <a:lstStyle/>
+          <a:p>
+            <a:pPr algn="r"/>
+            <a:r>
+              <a:rPr sz="1200" b="0">
+                <a:solidFill>
+                  <a:srgbClr val="475569"/>
+                </a:solidFill>
+                <a:latin typeface="Helvetica Neue"/>
+              </a:rPr>
+              <a:t>31</a:t>
+            </a:r>
+          </a:p>
+        </p:txBody>
+      </p:sp>
+      <p:pic>
+        <p:nvPicPr>
+          <p:cNvPr id="7" name="video-thumb-1" descr="01_one_owner_per_fact.png">
+            <a:hlinkClick r:id="rId3"/>
+          </p:cNvPr>
+          <p:cNvPicPr>
+            <a:picLocks noChangeAspect="1"/>
+          </p:cNvPicPr>
+          <p:nvPr/>
+        </p:nvPicPr>
+        <p:blipFill>
+          <a:blip r:embed="rId2"/>
+          <a:stretch>
+            <a:fillRect/>
+          </a:stretch>
+        </p:blipFill>
+        <p:spPr>
+          <a:xfrm>
+            <a:off x="609600" y="1600200"/>
+            <a:ext cx="3454400" cy="1943100"/>
+          </a:xfrm>
+          <a:prstGeom prst="rect">
+            <a:avLst/>
+          </a:prstGeom>
+          <a:ln>
+            <a:solidFill>
+              <a:srgbClr val="CBD5E1"/>
+            </a:solidFill>
+          </a:ln>
+        </p:spPr>
+      </p:pic>
+      <p:sp>
+        <p:nvSpPr>
+          <p:cNvPr id="8" name="video-title-1"/>
+          <p:cNvSpPr txBox="1"/>
+          <p:nvPr/>
+        </p:nvSpPr>
+        <p:spPr>
+          <a:xfrm>
+            <a:off x="609600" y="3623300"/>
+            <a:ext cx="3454400" cy="520000"/>
+          </a:xfrm>
+          <a:prstGeom prst="rect">
+            <a:avLst/>
+          </a:prstGeom>
+          <a:noFill/>
+        </p:spPr>
+        <p:txBody>
+          <a:bodyPr wrap="square" lIns="0" rIns="0" tIns="0" bIns="0" anchor="t">
+            <a:spAutoFit/>
+          </a:bodyPr>
+          <a:lstStyle/>
+          <a:p>
+            <a:pPr algn="l"/>
+            <a:r>
+              <a:rPr sz="1500" b="1">
+                <a:solidFill>
+                  <a:srgbClr val="111827"/>
+                </a:solidFill>
+                <a:latin typeface="Helvetica Neue"/>
+                <a:hlinkClick r:id="rId3"/>
+              </a:rPr>
+              <a:t>▶ Polyglot persistence: one owner per fact  (1:30)</a:t>
+            </a:r>
+          </a:p>
+        </p:txBody>
+      </p:sp>
+      <p:pic>
+        <p:nvPicPr>
+          <p:cNvPr id="9" name="video-thumb-2" descr="02_outbox_and_versions.png">
+            <a:hlinkClick r:id="rId5"/>
+          </p:cNvPr>
+          <p:cNvPicPr>
+            <a:picLocks noChangeAspect="1"/>
+          </p:cNvPicPr>
+          <p:nvPr/>
+        </p:nvPicPr>
+        <p:blipFill>
+          <a:blip r:embed="rId4"/>
+          <a:stretch>
+            <a:fillRect/>
+          </a:stretch>
+        </p:blipFill>
+        <p:spPr>
+          <a:xfrm>
+            <a:off x="4368800" y="1600200"/>
+            <a:ext cx="3454400" cy="1943100"/>
+          </a:xfrm>
+          <a:prstGeom prst="rect">
+            <a:avLst/>
+          </a:prstGeom>
+          <a:ln>
+            <a:solidFill>
+              <a:srgbClr val="CBD5E1"/>
+            </a:solidFill>
+          </a:ln>
+        </p:spPr>
+      </p:pic>
+      <p:sp>
+        <p:nvSpPr>
+          <p:cNvPr id="10" name="video-title-2"/>
+          <p:cNvSpPr txBox="1"/>
+          <p:nvPr/>
+        </p:nvSpPr>
+        <p:spPr>
+          <a:xfrm>
+            <a:off x="4368800" y="3623300"/>
+            <a:ext cx="3454400" cy="520000"/>
+          </a:xfrm>
+          <a:prstGeom prst="rect">
+            <a:avLst/>
+          </a:prstGeom>
+          <a:noFill/>
+        </p:spPr>
+        <p:txBody>
+          <a:bodyPr wrap="square" lIns="0" rIns="0" tIns="0" bIns="0" anchor="t">
+            <a:spAutoFit/>
+          </a:bodyPr>
+          <a:lstStyle/>
+          <a:p>
+            <a:pPr algn="l"/>
+            <a:r>
+              <a:rPr sz="1500" b="1">
+                <a:solidFill>
+                  <a:srgbClr val="111827"/>
+                </a:solidFill>
+                <a:latin typeface="Helvetica Neue"/>
+                <a:hlinkClick r:id="rId5"/>
+              </a:rPr>
+              <a:t>▶ Keeping two databases consistent: outbox and version guard  (1:42)</a:t>
+            </a:r>
+          </a:p>
+        </p:txBody>
+      </p:sp>
+      <p:pic>
+        <p:nvPicPr>
+          <p:cNvPr id="11" name="video-thumb-3" descr="03_incident_triage.png">
+            <a:hlinkClick r:id="rId7"/>
+          </p:cNvPr>
+          <p:cNvPicPr>
+            <a:picLocks noChangeAspect="1"/>
+          </p:cNvPicPr>
+          <p:nvPr/>
+        </p:nvPicPr>
+        <p:blipFill>
+          <a:blip r:embed="rId6"/>
+          <a:stretch>
+            <a:fillRect/>
+          </a:stretch>
+        </p:blipFill>
+        <p:spPr>
+          <a:xfrm>
+            <a:off x="8128000" y="1600200"/>
+            <a:ext cx="3454400" cy="1943100"/>
+          </a:xfrm>
+          <a:prstGeom prst="rect">
+            <a:avLst/>
+          </a:prstGeom>
+          <a:ln>
+            <a:solidFill>
+              <a:srgbClr val="CBD5E1"/>
+            </a:solidFill>
+          </a:ln>
+        </p:spPr>
+      </p:pic>
+      <p:sp>
+        <p:nvSpPr>
+          <p:cNvPr id="12" name="video-title-3"/>
+          <p:cNvSpPr txBox="1"/>
+          <p:nvPr/>
+        </p:nvSpPr>
+        <p:spPr>
+          <a:xfrm>
+            <a:off x="8128000" y="3623300"/>
+            <a:ext cx="3454400" cy="520000"/>
+          </a:xfrm>
+          <a:prstGeom prst="rect">
+            <a:avLst/>
+          </a:prstGeom>
+          <a:noFill/>
+        </p:spPr>
+        <p:txBody>
+          <a:bodyPr wrap="square" lIns="0" rIns="0" tIns="0" bIns="0" anchor="t">
+            <a:spAutoFit/>
+          </a:bodyPr>
+          <a:lstStyle/>
+          <a:p>
+            <a:pPr algn="l"/>
+            <a:r>
+              <a:rPr sz="1500" b="1">
+                <a:solidFill>
+                  <a:srgbClr val="111827"/>
+                </a:solidFill>
+                <a:latin typeface="Helvetica Neue"/>
+                <a:hlinkClick r:id="rId7"/>
+              </a:rPr>
+              <a:t>▶ Triage a cross-database incident  (1:24)</a:t>
+            </a:r>
+          </a:p>
+        </p:txBody>
+      </p:sp>
+      <p:sp>
+        <p:nvSpPr>
+          <p:cNvPr id="13" name="videos-note"/>
+          <p:cNvSpPr txBox="1"/>
+          <p:nvPr/>
+        </p:nvSpPr>
+        <p:spPr>
+          <a:xfrm>
+            <a:off x="609600" y="4243300"/>
+            <a:ext cx="10372800" cy="300000"/>
+          </a:xfrm>
+          <a:prstGeom prst="rect">
+            <a:avLst/>
+          </a:prstGeom>
+          <a:noFill/>
+        </p:spPr>
+        <p:txBody>
+          <a:bodyPr wrap="square" lIns="0" rIns="0" tIns="0" bIns="0" anchor="t">
+            <a:spAutoFit/>
+          </a:bodyPr>
+          <a:lstStyle/>
+          <a:p>
+            <a:pPr algn="l"/>
+            <a:r>
+              <a:rPr sz="1200" b="0">
+                <a:solidFill>
+                  <a:srgbClr val="475569"/>
+                </a:solidFill>
+                <a:latin typeface="Helvetica Neue"/>
+              </a:rPr>
+              <a:t>Click a thumbnail to play on GitHub. Silent, with captions and .srt subtitles; diagrams are schematic.</a:t>
+            </a:r>
+          </a:p>
+        </p:txBody>
+      </p:sp>
+    </p:spTree>
+  </p:cSld>
+  <p:clrMapOvr>
+    <a:masterClrMapping/>
+  </p:clrMapOvr>
+</p:sld>
+</file>
+
 <file path=ppt/slides/slide4.xml><?xml version="1.0" encoding="utf-8"?>
 <p:sld xmlns:p="http://schemas.openxmlformats.org/presentationml/2006/main">
   <p:cSld>

--- a/week_14/week_14_polyglot_incident.pptx
+++ b/week_14/week_14_polyglot_incident.pptx
@@ -472,44 +472,28 @@
           <a:lstStyle xmlns:a="http://schemas.openxmlformats.org/drawingml/2006/main"/>
           <a:p xmlns:a="http://schemas.openxmlformats.org/drawingml/2006/main">
             <a:r>
-              <a:t>The staff member has resolved a request, but the resident still sees it as open. Each person is looking at a plausible screen. The immediate problem is deciding which stored fact establishes the accepted state and why the other screen has not caught up. This is a common kind of integration problem, even when each database can answer its own queries successfully.</a:t>
-            </a:r>
-          </a:p>
-          <a:p xmlns:a="http://schemas.openxmlformats.org/drawingml/2006/main">
-            <a:r>
-              <a:t/>
-            </a:r>
-          </a:p>
-          <a:p xmlns:a="http://schemas.openxmlformats.org/drawingml/2006/main">
-            <a:r>
-              <a:t>Our case uses PostgreSQL for the authoritative ticket and MongoDB for a resident-facing projection. Polyglot persistence means an application uses different data technologies for different responsibilities. It does not require every project to use several databases. We will study this two-store design because it makes partial failure visible, not because adding another product automatically improves a small system.</a:t>
-            </a:r>
-          </a:p>
-          <a:p xmlns:a="http://schemas.openxmlformats.org/drawingml/2006/main">
-            <a:r>
-              <a:t/>
-            </a:r>
-          </a:p>
-          <a:p xmlns:a="http://schemas.openxmlformats.org/drawingml/2006/main">
-            <a:r>
-              <a:t>Today we will trace one change, examine the transaction that records it, and experiment with repeated and delayed events. The notebook gives us an actual local SQLite transaction and a small Python model of the derived copy. That combination lets us inspect the mechanism without deploying a message broker or managing another cloud account.</a:t>
-            </a:r>
-          </a:p>
-          <a:p xmlns:a="http://schemas.openxmlformats.org/drawingml/2006/main">
-            <a:r>
-              <a:t/>
-            </a:r>
-          </a:p>
-          <a:p xmlns:a="http://schemas.openxmlformats.org/drawingml/2006/main">
-            <a:r>
-              <a:t>The second meeting applies the same reasoning to your existing final project. You will work on a specific operational gap, such as access, an index decision, or a recovery check. The aim is a system you can explain and investigate, with a clear distinction between what your experiment demonstrated and what would require further production work.</a:t>
-            </a:r>
-          </a:p>
-          <a:p xmlns:a="http://schemas.openxmlformats.org/drawingml/2006/main">
-            <a:r>
-              <a:t/>
-            </a:r>
-          </a:p>
+              <a:t>Welcome to Week 14. Look at the two lines in the middle of the slide. The staff dashboard says resolved. The resident page says open. Both screens are working. Both databases answer their own queries just fine. And they disagree. That is our problem for the week.</a:t>
+            </a:r>
+          </a:p>
+          <a:p xmlns:a="http://schemas.openxmlformats.org/drawingml/2006/main"/>
+          <a:p xmlns:a="http://schemas.openxmlformats.org/drawingml/2006/main">
+            <a:r>
+              <a:t>Our case has two stores. PostgreSQL holds the real ticket, the one staff update. MongoDB holds a copy of it arranged for the resident page. Using different databases for different jobs has a name, polyglot persistence. I want to be clear up front: that does not mean every project should use several databases. We are studying this two-store design because it makes partial failure easy to see, not because more products make a small system better.</a:t>
+            </a:r>
+          </a:p>
+          <a:p xmlns:a="http://schemas.openxmlformats.org/drawingml/2006/main"/>
+          <a:p xmlns:a="http://schemas.openxmlformats.org/drawingml/2006/main">
+            <a:r>
+              <a:t>Here is the plan. On Day 1 we trace one change from the staff click to the resident page, we look at the transaction that records it, and we experiment with events that arrive twice or arrive late. The notebook gives us a real local SQLite transaction and a small Python model of the copy, so we can see the mechanism without a message broker or another cloud account.</a:t>
+            </a:r>
+          </a:p>
+          <a:p xmlns:a="http://schemas.openxmlformats.org/drawingml/2006/main"/>
+          <a:p xmlns:a="http://schemas.openxmlformats.org/drawingml/2006/main">
+            <a:r>
+              <a:t>On Day 2 we take the same reasoning to your own final project. You pick one operational gap, like access, an index decision, or a restore check, and you close it.</a:t>
+            </a:r>
+          </a:p>
+          <a:p xmlns:a="http://schemas.openxmlformats.org/drawingml/2006/main"/>
           <a:p xmlns:a="http://schemas.openxmlformats.org/drawingml/2006/main">
             <a:r>
               <a:t>[Sources]</a:t>
@@ -587,44 +571,34 @@
           <a:lstStyle xmlns:a="http://schemas.openxmlformats.org/drawingml/2006/main"/>
           <a:p xmlns:a="http://schemas.openxmlformats.org/drawingml/2006/main">
             <a:r>
-              <a:t>The table separates the stages we can actually observe in the notebook. Fresh initialization produces an open ticket at version sixteen and no outbox events. The deliberate failure returns us to exactly that committed state. The successful attempt produces resolved at version seventeen and one recorded event.</a:t>
-            </a:r>
-          </a:p>
-          <a:p xmlns:a="http://schemas.openxmlformats.org/drawingml/2006/main">
-            <a:r>
-              <a:t/>
-            </a:r>
-          </a:p>
-          <a:p xmlns:a="http://schemas.openxmlformats.org/drawingml/2006/main">
-            <a:r>
-              <a:t>For the later delivery experiment, the notebook then performs another accepted source update. Staff close the ticket at version eighteen, and the same transaction records its outgoing event. At that point there are two outbox rows. This later version does not rewrite the paper incident's earlier observation. The supplied incident stops at version seventeen, while the experiment continues the story.</a:t>
-            </a:r>
-          </a:p>
-          <a:p xmlns:a="http://schemas.openxmlformats.org/drawingml/2006/main">
-            <a:r>
-              <a:t/>
-            </a:r>
-          </a:p>
-          <a:p xmlns:a="http://schemas.openxmlformats.org/drawingml/2006/main">
-            <a:r>
-              <a:t>Recorded, published, and applied describe different milestones. These cells record events in a local table. They do not start a relay, deliver messages, or update a remote MongoDB collection. Two outbox rows therefore establish that outgoing work exists, not that two resident pages have changed.</a:t>
-            </a:r>
-          </a:p>
-          <a:p xmlns:a="http://schemas.openxmlformats.org/drawingml/2006/main">
-            <a:r>
-              <a:t/>
-            </a:r>
-          </a:p>
-          <a:p xmlns:a="http://schemas.openxmlformats.org/drawingml/2006/main">
-            <a:r>
-              <a:t>This separation gives us a useful debugging habit. State which milestone a count or timestamp supports. An outbox count can help locate work waiting to leave the source. A consumer checkpoint can describe receipt or processing progress. A read of the derived document can show the version currently served. None of those observations automatically substitutes for all the others, especially when a service is paused or acknowledgments have been lost.</a:t>
-            </a:r>
-          </a:p>
-          <a:p xmlns:a="http://schemas.openxmlformats.org/drawingml/2006/main">
-            <a:r>
-              <a:t/>
-            </a:r>
-          </a:p>
+              <a:t>This table tracks ticket 1008 and the outbox through every notebook stage. Read down the rows.</a:t>
+            </a:r>
+          </a:p>
+          <a:p xmlns:a="http://schemas.openxmlformats.org/drawingml/2006/main"/>
+          <a:p xmlns:a="http://schemas.openxmlformats.org/drawingml/2006/main">
+            <a:r>
+              <a:t>Fresh setup: open, version 16, zero outbox rows. Failure and rollback: open, version 16, zero rows. That is exactly where we started, which is what a rollback should give you. Successful local commit: resolved, version 17, one row. Then a later accepted close operation: staff close the ticket, closed, version 18, and its event is recorded in the same transaction, so two rows.</a:t>
+            </a:r>
+          </a:p>
+          <a:p xmlns:a="http://schemas.openxmlformats.org/drawingml/2006/main"/>
+          <a:p xmlns:a="http://schemas.openxmlformats.org/drawingml/2006/main">
+            <a:r>
+              <a:t>Read the box at the bottom. The paper incident you will analyze observes version 17. Version 18 only happens later, in the experiment. The incident stops at 17, and the experiment continues the story. Keep those two apart when you write.</a:t>
+            </a:r>
+          </a:p>
+          <a:p xmlns:a="http://schemas.openxmlformats.org/drawingml/2006/main"/>
+          <a:p xmlns:a="http://schemas.openxmlformats.org/drawingml/2006/main">
+            <a:r>
+              <a:t>The second line of the box is the key point. These local cells do not run a relay or a consumer. Two outbox rows means two pieces of outgoing work exist. It does not mean any resident page changed.</a:t>
+            </a:r>
+          </a:p>
+          <a:p xmlns:a="http://schemas.openxmlformats.org/drawingml/2006/main"/>
+          <a:p xmlns:a="http://schemas.openxmlformats.org/drawingml/2006/main">
+            <a:r>
+              <a:t>So there are three different milestones: recorded, published, and applied. Each kind of evidence supports a different one. An outbox count tells you work is waiting to leave. A consumer checkpoint tells you what was received or processed. A read of the resident document tells you what is actually being served. When something is stuck, ask which milestone your evidence actually proves.</a:t>
+            </a:r>
+          </a:p>
+          <a:p xmlns:a="http://schemas.openxmlformats.org/drawingml/2006/main"/>
           <a:p xmlns:a="http://schemas.openxmlformats.org/drawingml/2006/main">
             <a:r>
               <a:t>[Sources]</a:t>
@@ -702,44 +676,34 @@
           <a:lstStyle xmlns:a="http://schemas.openxmlformats.org/drawingml/2006/main"/>
           <a:p xmlns:a="http://schemas.openxmlformats.org/drawingml/2006/main">
             <a:r>
-              <a:t>Idempotency means that applying the same operation again has the same intended final effect as applying it once. Setting a status to resolved can have that property. If the record already contains resolved, assigning resolved again leaves the same value. Adding one to a counter does not have that property by itself. Two applications produce two increments.</a:t>
-            </a:r>
-          </a:p>
-          <a:p xmlns:a="http://schemas.openxmlformats.org/drawingml/2006/main">
-            <a:r>
-              <a:t/>
-            </a:r>
-          </a:p>
-          <a:p xmlns:a="http://schemas.openxmlformats.org/drawingml/2006/main">
-            <a:r>
-              <a:t>Ordering is a separate issue. Suppose a ticket becomes closed and then an old event assigns open. Assigning open repeatedly is repeat-safe in the narrow sense, but it still replaces a newer accepted state with an older one. Being idempotent is therefore not a complete correctness argument for an event handler.</a:t>
-            </a:r>
-          </a:p>
-          <a:p xmlns:a="http://schemas.openxmlformats.org/drawingml/2006/main">
-            <a:r>
-              <a:t/>
-            </a:r>
-          </a:p>
-          <a:p xmlns:a="http://schemas.openxmlformats.org/drawingml/2006/main">
-            <a:r>
-              <a:t>Our experiment uses complete-state events. Each event carries the intended status at a particular source version. The consumer accepts only a version newer than the one it already holds. Duplicate and older complete-state deliveries become no-ops under that rule.</a:t>
-            </a:r>
-          </a:p>
-          <a:p xmlns:a="http://schemas.openxmlformats.org/drawingml/2006/main">
-            <a:r>
-              <a:t/>
-            </a:r>
-          </a:p>
-          <a:p xmlns:a="http://schemas.openxmlformats.org/drawingml/2006/main">
-            <a:r>
-              <a:t>There are assumptions behind the rule. All events in this loop describe the same ticket, their versions come from one authoritative sequence, and their payloads describe the whole projected status. We are not applying arbitrary financial transfers or independent increments. A side effect such as sending an email would also need its own repeat-handling policy. Keeping the operation's meaning explicit prevents a useful version check from becoming an overgeneralized promise about every event-driven system.</a:t>
-            </a:r>
-          </a:p>
-          <a:p xmlns:a="http://schemas.openxmlformats.org/drawingml/2006/main">
-            <a:r>
-              <a:t/>
-            </a:r>
-          </a:p>
+              <a:t>Two words people use as if they mean the same thing. They do not. Look at the table.</a:t>
+            </a:r>
+          </a:p>
+          <a:p xmlns:a="http://schemas.openxmlformats.org/drawingml/2006/main"/>
+          <a:p xmlns:a="http://schemas.openxmlformats.org/drawingml/2006/main">
+            <a:r>
+              <a:t>Idempotency means doing an operation twice has the same final effect as doing it once. First row: set status to resolved, twice. You still have resolved. That is idempotent. Second row: add one to a counter, twice. You get two increments instead of one. Not idempotent. That is why retries are dangerous for some operations and harmless for others.</a:t>
+            </a:r>
+          </a:p>
+          <a:p xmlns:a="http://schemas.openxmlformats.org/drawingml/2006/main"/>
+          <a:p xmlns:a="http://schemas.openxmlformats.org/drawingml/2006/main">
+            <a:r>
+              <a:t>Now the third row, which is the trap. Set an older status after a newer one. Say the ticket is closed, and then an old event arrives that says set it to open. Setting open is perfectly repeat-safe. Do it ten times and you still have open. But it replaced a newer accepted state with an older one. The resident's ticket just went backwards. So idempotent is not the same as correct.</a:t>
+            </a:r>
+          </a:p>
+          <a:p xmlns:a="http://schemas.openxmlformats.org/drawingml/2006/main"/>
+          <a:p xmlns:a="http://schemas.openxmlformats.org/drawingml/2006/main">
+            <a:r>
+              <a:t>That is why the box says a retry-safe state assignment still needs an ordering rule. Our events are complete-state events. Each one carries the full status at a version assigned by the source, and the consumer only accepts a version newer than the one it holds. Duplicates and old events become no-ops.</a:t>
+            </a:r>
+          </a:p>
+          <a:p xmlns:a="http://schemas.openxmlformats.org/drawingml/2006/main"/>
+          <a:p xmlns:a="http://schemas.openxmlformats.org/drawingml/2006/main">
+            <a:r>
+              <a:t>That rule rests on assumptions: one ticket, one authoritative version sequence, and payloads that carry the whole status. It is not a promise about every event-driven system.</a:t>
+            </a:r>
+          </a:p>
+          <a:p xmlns:a="http://schemas.openxmlformats.org/drawingml/2006/main"/>
           <a:p xmlns:a="http://schemas.openxmlformats.org/drawingml/2006/main">
             <a:r>
               <a:t>[Sources]</a:t>
@@ -817,44 +781,40 @@
           <a:lstStyle xmlns:a="http://schemas.openxmlformats.org/drawingml/2006/main"/>
           <a:p xmlns:a="http://schemas.openxmlformats.org/drawingml/2006/main">
             <a:r>
-              <a:t>The loop reads each event from the delivery list. When version enforcement is enabled, it compares the incoming source version with the version currently stored in the projection. An incoming version that is equal or smaller is ignored. A larger version can update the status, stored version, and last event identifier.</a:t>
-            </a:r>
-          </a:p>
-          <a:p xmlns:a="http://schemas.openxmlformats.org/drawingml/2006/main">
-            <a:r>
-              <a:t/>
-            </a:r>
-          </a:p>
-          <a:p xmlns:a="http://schemas.openxmlformats.org/drawingml/2006/main">
-            <a:r>
-              <a:t>The last event identifier records which applied event supplied the current projected state. Receiving a duplicate does not replace that state with an extra history entry. This particular model stores the latest state rather than accumulating an event log in the projection itself.</a:t>
-            </a:r>
-          </a:p>
-          <a:p xmlns:a="http://schemas.openxmlformats.org/drawingml/2006/main">
-            <a:r>
-              <a:t/>
-            </a:r>
-          </a:p>
-          <a:p xmlns:a="http://schemas.openxmlformats.org/drawingml/2006/main">
-            <a:r>
-              <a:t>Each execution of the complete cell resets the projection to open at version sixteen before processing the list. That makes comparisons between experiments meaningful. Changing a flag and rerunning the cell starts from the same initial condition rather than carrying an unknown result from an earlier run.</a:t>
-            </a:r>
-          </a:p>
-          <a:p xmlns:a="http://schemas.openxmlformats.org/drawingml/2006/main">
-            <a:r>
-              <a:t/>
-            </a:r>
-          </a:p>
-          <a:p xmlns:a="http://schemas.openxmlformats.org/drawingml/2006/main">
-            <a:r>
-              <a:t>This loop is intentionally single-consumer Python. The comparison and dictionary assignment are separate language operations. We must not copy that read-then-write arrangement into two independent database workers and assume it is race-free. Two workers might both read an old version before either writes. Later in the deck we will express the comparison and update in one MongoDB command. For now, the small loop lets us reason about the acceptance rule and inspect the result after every delivery.</a:t>
-            </a:r>
-          </a:p>
-          <a:p xmlns:a="http://schemas.openxmlformats.org/drawingml/2006/main">
-            <a:r>
-              <a:t/>
-            </a:r>
-          </a:p>
+              <a:t>Here is the guard in code. Let's read the loop.</a:t>
+            </a:r>
+          </a:p>
+          <a:p xmlns:a="http://schemas.openxmlformats.org/drawingml/2006/main"/>
+          <a:p xmlns:a="http://schemas.openxmlformats.org/drawingml/2006/main">
+            <a:r>
+              <a:t>For each event in the deliveries list: if ENFORCE_VERSION is on, and the incoming source_version is less than or equal to the version the projection already holds, we print "Ignore old or duplicate event" and leave the projection alone. Otherwise we apply it. We copy the status, the source_version, and the last_event_id into the projection, and print "Apply".</a:t>
+            </a:r>
+          </a:p>
+          <a:p xmlns:a="http://schemas.openxmlformats.org/drawingml/2006/main"/>
+          <a:p xmlns:a="http://schemas.openxmlformats.org/drawingml/2006/main">
+            <a:r>
+              <a:t>Notice that it says less than or equal. Equal catches the duplicate. Less than catches the late old event. Both get ignored for the same reason: they carry nothing newer.</a:t>
+            </a:r>
+          </a:p>
+          <a:p xmlns:a="http://schemas.openxmlformats.org/drawingml/2006/main"/>
+          <a:p xmlns:a="http://schemas.openxmlformats.org/drawingml/2006/main">
+            <a:r>
+              <a:t>The last_event_id field records which event supplied the current state. A duplicate does not change it, and this projection holds only the latest state, not a history.</a:t>
+            </a:r>
+          </a:p>
+          <a:p xmlns:a="http://schemas.openxmlformats.org/drawingml/2006/main"/>
+          <a:p xmlns:a="http://schemas.openxmlformats.org/drawingml/2006/main">
+            <a:r>
+              <a:t>Read the note under the code. Each cell run resets the projection to open, version 16. That is deliberate. When you flip a flag and rerun, you start from the same place, so you are comparing like with like instead of inheriting leftovers from your last run.</a:t>
+            </a:r>
+          </a:p>
+          <a:p xmlns:a="http://schemas.openxmlformats.org/drawingml/2006/main"/>
+          <a:p xmlns:a="http://schemas.openxmlformats.org/drawingml/2006/main">
+            <a:r>
+              <a:t>And the second line: the dictionary loop models one consumer. It is not a concurrent database write. The check and the assignment are two separate Python steps, and two real workers could both read version 16 before either one writes. In a few slides we will see the MongoDB command that does the check and the write as one atomic operation.</a:t>
+            </a:r>
+          </a:p>
+          <a:p xmlns:a="http://schemas.openxmlformats.org/drawingml/2006/main"/>
           <a:p xmlns:a="http://schemas.openxmlformats.org/drawingml/2006/main">
             <a:r>
               <a:t>[Sources]</a:t>
@@ -937,44 +897,34 @@
           <a:lstStyle xmlns:a="http://schemas.openxmlformats.org/drawingml/2006/main"/>
           <a:p xmlns:a="http://schemas.openxmlformats.org/drawingml/2006/main">
             <a:r>
-              <a:t>Read this trace from top to bottom, starting with open at version sixteen. The first version-seventeen event is newer, so it applies and the resident sees resolved at seventeen. The next delivery is the same event again. Its version equals the stored version, so the guard ignores it.</a:t>
-            </a:r>
-          </a:p>
-          <a:p xmlns:a="http://schemas.openxmlformats.org/drawingml/2006/main">
-            <a:r>
-              <a:t/>
-            </a:r>
-          </a:p>
-          <a:p xmlns:a="http://schemas.openxmlformats.org/drawingml/2006/main">
-            <a:r>
-              <a:t>Version sixteen then arrives late. It carries the older open status, but sixteen is smaller than seventeen. The projection remains resolved at seventeen. Finally, version eighteen arrives with closed. It is newer than the stored version, so the projection becomes closed at eighteen.</a:t>
-            </a:r>
-          </a:p>
-          <a:p xmlns:a="http://schemas.openxmlformats.org/drawingml/2006/main">
-            <a:r>
-              <a:t/>
-            </a:r>
-          </a:p>
-          <a:p xmlns:a="http://schemas.openxmlformats.org/drawingml/2006/main">
-            <a:r>
-              <a:t>The output describes the projection after each delivery, not just the event payload. That is why a line containing an old event can still be followed by the newer resident state. The handler made a decision to leave the stored state alone.</a:t>
-            </a:r>
-          </a:p>
-          <a:p xmlns:a="http://schemas.openxmlformats.org/drawingml/2006/main">
-            <a:r>
-              <a:t/>
-            </a:r>
-          </a:p>
-          <a:p xmlns:a="http://schemas.openxmlformats.org/drawingml/2006/main">
-            <a:r>
-              <a:t>Notice a limit of checking only the final line. With the default order, an unguarded handler could briefly regress to open at sixteen and then finish at closed eighteen because eighteen happens to arrive last. The ending value would conceal the intermediate error. Our individual experiment moves the old event to the end so the regression is easier to see. Both traces matter when explaining why the rule exists. A successful final value under one convenient arrival order is weaker than testing the behavior when delivery order changes.</a:t>
-            </a:r>
-          </a:p>
-          <a:p xmlns:a="http://schemas.openxmlformats.org/drawingml/2006/main">
-            <a:r>
-              <a:t/>
-            </a:r>
-          </a:p>
+              <a:t>Let's run the default list and read the trace from top to bottom. We start at open, version 16.</a:t>
+            </a:r>
+          </a:p>
+          <a:p xmlns:a="http://schemas.openxmlformats.org/drawingml/2006/main"/>
+          <a:p xmlns:a="http://schemas.openxmlformats.org/drawingml/2006/main">
+            <a:r>
+              <a:t>First delivery: version 17. It is newer than 16, so it applies. Stored state: resolved, 17. Second delivery: 17 again, the same event redelivered. 17 is not newer than 17, so the guard ignores the duplicate. Still resolved, 17. Third: version 16, arriving late. It carries the old open status, but 16 is older than 17, so it is ignored. Still resolved, 17. Fourth: version 18, closed. Newer, so it applies. Closed, 18.</a:t>
+            </a:r>
+          </a:p>
+          <a:p xmlns:a="http://schemas.openxmlformats.org/drawingml/2006/main"/>
+          <a:p xmlns:a="http://schemas.openxmlformats.org/drawingml/2006/main">
+            <a:r>
+              <a:t>Look at the right-hand column. It shows the stored state after each delivery, not the event's payload. That is why a line about an old event is followed by the newer state. The handler decided to leave things alone.</a:t>
+            </a:r>
+          </a:p>
+          <a:p xmlns:a="http://schemas.openxmlformats.org/drawingml/2006/main"/>
+          <a:p xmlns:a="http://schemas.openxmlformats.org/drawingml/2006/main">
+            <a:r>
+              <a:t>Now here is a subtle trap. Suppose the guard were off. With this order, the late 16 would knock the ticket back to open for a moment, and then 18 would arrive last and set it to closed. The final line would look perfect. The ending value hides the mistake in the middle. A resident who loaded the page at the wrong second would have seen open.</a:t>
+            </a:r>
+          </a:p>
+          <a:p xmlns:a="http://schemas.openxmlformats.org/drawingml/2006/main"/>
+          <a:p xmlns:a="http://schemas.openxmlformats.org/drawingml/2006/main">
+            <a:r>
+              <a:t>That is why your experiment moves the old event to the very end. A correct final value under one lucky arrival order proves much less than testing what happens when the order changes.</a:t>
+            </a:r>
+          </a:p>
+          <a:p xmlns:a="http://schemas.openxmlformats.org/drawingml/2006/main"/>
           <a:p xmlns:a="http://schemas.openxmlformats.org/drawingml/2006/main">
             <a:r>
               <a:t>[Sources]</a:t>
@@ -1052,44 +1002,40 @@
           <a:lstStyle xmlns:a="http://schemas.openxmlformats.org/drawingml/2006/main"/>
           <a:p xmlns:a="http://schemas.openxmlformats.org/drawingml/2006/main">
             <a:r>
-              <a:t>In the delivery cell, move the entire version-sixteen event entry to the end of the list. Keep the event's fields together. The order should now be seventeen, seventeen again, eighteen, and finally sixteen. Leave version enforcement enabled and rerun that cell.</a:t>
-            </a:r>
-          </a:p>
-          <a:p xmlns:a="http://schemas.openxmlformats.org/drawingml/2006/main">
-            <a:r>
-              <a:t/>
-            </a:r>
-          </a:p>
-          <a:p xmlns:a="http://schemas.openxmlformats.org/drawingml/2006/main">
-            <a:r>
-              <a:t>Next change ENFORCE_VERSION to False and run the same cell again. Compare the final resident status and source version with the previous run. The event payloads have not changed. What changed is whether the consumer refuses a stale version. After observing the broken behavior, restore the flag to True and run it again.</a:t>
-            </a:r>
-          </a:p>
-          <a:p xmlns:a="http://schemas.openxmlformats.org/drawingml/2006/main">
-            <a:r>
-              <a:t/>
-            </a:r>
-          </a:p>
-          <a:p xmlns:a="http://schemas.openxmlformats.org/drawingml/2006/main">
-            <a:r>
-              <a:t>Because the complete cell resets its starting projection, each of those runs is comparable. You are not relying on a leftover dictionary from an earlier experiment. Keep the actual final status and version from the broken and repaired runs for your incident update.</a:t>
-            </a:r>
-          </a:p>
-          <a:p xmlns:a="http://schemas.openxmlformats.org/drawingml/2006/main">
-            <a:r>
-              <a:t/>
-            </a:r>
-          </a:p>
-          <a:p xmlns:a="http://schemas.openxmlformats.org/drawingml/2006/main">
-            <a:r>
-              <a:t>If Python reports a syntax error after moving the entry, check the comma between dictionary entries and the closing square bracket of the list. You do not need to rewrite the loop or introduce another helper function. The small edit is enough to expose the ordering problem. After restoring the guard, continue to the reconciliation section. It will show why fixing the visible ticket still leaves a reason to inspect the other records served by the same application.</a:t>
-            </a:r>
-          </a:p>
-          <a:p xmlns:a="http://schemas.openxmlformats.org/drawingml/2006/main">
-            <a:r>
-              <a:t/>
-            </a:r>
-          </a:p>
+              <a:t>Now it is your turn. There are four steps on the slide.</a:t>
+            </a:r>
+          </a:p>
+          <a:p xmlns:a="http://schemas.openxmlformats.org/drawingml/2006/main"/>
+          <a:p xmlns:a="http://schemas.openxmlformats.org/drawingml/2006/main">
+            <a:r>
+              <a:t>In the delivery cell, move the whole version 16 event to the end of the deliveries list. Keep all of its fields together. The order is now 17, 17 again, 18, and 16 last. Run it with ENFORCE_VERSION equal to True. You should end at closed, version 18.</a:t>
+            </a:r>
+          </a:p>
+          <a:p xmlns:a="http://schemas.openxmlformats.org/drawingml/2006/main"/>
+          <a:p xmlns:a="http://schemas.openxmlformats.org/drawingml/2006/main">
+            <a:r>
+              <a:t>Then change it to False and rerun. Same events, same payloads. The only thing that changed is whether the consumer refuses a stale version. Look at the final status and version. This is the broken run, and you are watching the late event win.</a:t>
+            </a:r>
+          </a:p>
+          <a:p xmlns:a="http://schemas.openxmlformats.org/drawingml/2006/main"/>
+          <a:p xmlns:a="http://schemas.openxmlformats.org/drawingml/2006/main">
+            <a:r>
+              <a:t>Then restore True and rerun. That is your repaired run. Because the cell resets the projection each time, these runs are comparable. You are not relying on leftover state from the run before.</a:t>
+            </a:r>
+          </a:p>
+          <a:p xmlns:a="http://schemas.openxmlformats.org/drawingml/2006/main"/>
+          <a:p xmlns:a="http://schemas.openxmlformats.org/drawingml/2006/main">
+            <a:r>
+              <a:t>Now read the bottom box. Write down the final status and version from the broken run and from the repaired run. Those observed values go into your Brightspace incident update. Use what you actually saw, not what you expected to see.</a:t>
+            </a:r>
+          </a:p>
+          <a:p xmlns:a="http://schemas.openxmlformats.org/drawingml/2006/main"/>
+          <a:p xmlns:a="http://schemas.openxmlformats.org/drawingml/2006/main">
+            <a:r>
+              <a:t>If Python gives you a syntax error after the move, it is almost always a missing comma between dictionary entries or the closing square bracket of the list. You do not need to touch the loop or write a new function. The small edit is enough to expose the ordering problem. When you are done, continue to the reconciliation section.</a:t>
+            </a:r>
+          </a:p>
+          <a:p xmlns:a="http://schemas.openxmlformats.org/drawingml/2006/main"/>
           <a:p xmlns:a="http://schemas.openxmlformats.org/drawingml/2006/main">
             <a:r>
               <a:t>[Sources]</a:t>
@@ -1167,44 +1113,40 @@
           <a:lstStyle xmlns:a="http://schemas.openxmlformats.org/drawingml/2006/main"/>
           <a:p xmlns:a="http://schemas.openxmlformats.org/drawingml/2006/main">
             <a:r>
-              <a:t>The distinction in this table is about event meaning. A complete-state event says what the state should be at a particular accepted version. If version eighteen says the current total is three, it may supersede an older complete state, assuming the source is authoritative and the event contains all the fields this projection owns.</a:t>
-            </a:r>
-          </a:p>
-          <a:p xmlns:a="http://schemas.openxmlformats.org/drawingml/2006/main">
-            <a:r>
-              <a:t/>
-            </a:r>
-          </a:p>
-          <a:p xmlns:a="http://schemas.openxmlformats.org/drawingml/2006/main">
-            <a:r>
-              <a:t>A delta event says how to change an existing state. Suppose version seventeen adds one and version eighteen adds two. If we apply eighteen first and then ignore seventeen merely because it is older, we lose the earlier increment. A monotonic version number cannot reconstruct an effect that we chose not to apply.</a:t>
-            </a:r>
-          </a:p>
-          <a:p xmlns:a="http://schemas.openxmlformats.org/drawingml/2006/main">
-            <a:r>
-              <a:t/>
-            </a:r>
-          </a:p>
-          <a:p xmlns:a="http://schemas.openxmlformats.org/drawingml/2006/main">
-            <a:r>
-              <a:t>Delta processing therefore needs an appropriate design for ordering, duplicate detection, or reconstruction. An implementation might replay a complete ordered history, detect a missing version and wait, or rebuild from an authoritative total. The correct choice depends on the operation. We are not implementing those alternatives in today's required lab.</a:t>
-            </a:r>
-          </a:p>
-          <a:p xmlns:a="http://schemas.openxmlformats.org/drawingml/2006/main">
-            <a:r>
-              <a:t/>
-            </a:r>
-          </a:p>
-          <a:p xmlns:a="http://schemas.openxmlformats.org/drawingml/2006/main">
-            <a:r>
-              <a:t>This is useful interview reasoning because it states the boundary of a technique. You can explain that the simple guard works for our ticket's complete-state status events while recognizing that an incrementing inventory stream requires more care. The optional notebook extension explores that difference. The required submission remains the same short incident update using your observed broken and repaired status values, rather than an additional distributed-systems design report.</a:t>
-            </a:r>
-          </a:p>
-          <a:p xmlns:a="http://schemas.openxmlformats.org/drawingml/2006/main">
-            <a:r>
-              <a:t/>
-            </a:r>
-          </a:p>
+              <a:t>This slide marks the edge of the technique, and it is worth understanding, because it is where the simple guard stops working.</a:t>
+            </a:r>
+          </a:p>
+          <a:p xmlns:a="http://schemas.openxmlformats.org/drawingml/2006/main"/>
+          <a:p xmlns:a="http://schemas.openxmlformats.org/drawingml/2006/main">
+            <a:r>
+              <a:t>Look at the first row. The event means: the current total is 3. That is a complete state. If version 18 arrives before 17, that is fine. 18 says the total is 3, it is authoritative and complete, so it can replace the older state, and ignoring 17 afterward loses nothing.</a:t>
+            </a:r>
+          </a:p>
+          <a:p xmlns:a="http://schemas.openxmlformats.org/drawingml/2006/main"/>
+          <a:p xmlns:a="http://schemas.openxmlformats.org/drawingml/2006/main">
+            <a:r>
+              <a:t>Second row. The event means: add 2, after an earlier add 1. That is a delta, a change rather than a state. Now suppose 18, add 2, arrives first, and then we ignore 17, add 1, because it is older. We just lost the 1. The total is wrong, and no version number can bring back an effect we chose not to apply.</a:t>
+            </a:r>
+          </a:p>
+          <a:p xmlns:a="http://schemas.openxmlformats.org/drawingml/2006/main"/>
+          <a:p xmlns:a="http://schemas.openxmlformats.org/drawingml/2006/main">
+            <a:r>
+              <a:t>So delta events need a different policy. You might replay a complete ordered history, or notice a missing version and wait for it, or rebuild from an authoritative total. Which one is right depends on the operation.</a:t>
+            </a:r>
+          </a:p>
+          <a:p xmlns:a="http://schemas.openxmlformats.org/drawingml/2006/main"/>
+          <a:p xmlns:a="http://schemas.openxmlformats.org/drawingml/2006/main">
+            <a:r>
+              <a:t>Read the bottom box. The lab uses complete-state events. The delta case is an optional extension, and it is in the README if you want to try it. It is ungraded and adds no submission.</a:t>
+            </a:r>
+          </a:p>
+          <a:p xmlns:a="http://schemas.openxmlformats.org/drawingml/2006/main"/>
+          <a:p xmlns:a="http://schemas.openxmlformats.org/drawingml/2006/main">
+            <a:r>
+              <a:t>This is good interview reasoning, by the way. You can say where your technique works and where it does not. The guard fits ticket status. It does not fit an inventory stream.</a:t>
+            </a:r>
+          </a:p>
+          <a:p xmlns:a="http://schemas.openxmlformats.org/drawingml/2006/main"/>
           <a:p xmlns:a="http://schemas.openxmlformats.org/drawingml/2006/main">
             <a:r>
               <a:t>[Sources]</a:t>
@@ -1282,44 +1224,40 @@
           <a:lstStyle xmlns:a="http://schemas.openxmlformats.org/drawingml/2006/main"/>
           <a:p xmlns:a="http://schemas.openxmlformats.org/drawingml/2006/main">
             <a:r>
-              <a:t>This reference shows the database operation corresponding to the version rule. The filter identifies the existing document by its underscore-ID value and requires its source version to be less than eighteen. The update assigns closed, version eighteen, and the event identifier that supplied that state.</a:t>
-            </a:r>
-          </a:p>
-          <a:p xmlns:a="http://schemas.openxmlformats.org/drawingml/2006/main">
-            <a:r>
-              <a:t/>
-            </a:r>
-          </a:p>
-          <a:p xmlns:a="http://schemas.openxmlformats.org/drawingml/2006/main">
-            <a:r>
-              <a:t>MongoDB evaluates the filter and changes the matching document as one atomic operation. We do not first fetch the version into a separate Python variable and later issue an unconditional write. Keeping the expected condition inside the update prevents a delayed writer from blindly lowering the version after another worker has advanced the document.</a:t>
-            </a:r>
-          </a:p>
-          <a:p xmlns:a="http://schemas.openxmlformats.org/drawingml/2006/main">
-            <a:r>
-              <a:t/>
-            </a:r>
-          </a:p>
-          <a:p xmlns:a="http://schemas.openxmlformats.org/drawingml/2006/main">
-            <a:r>
-              <a:t>The command concerns one existing document. It assumes valid numeric versions from the same authoritative sequence and an event payload that represents the complete projected state. It does not atomically coordinate PostgreSQL, a message broker, and every MongoDB document. Any queue acknowledgment is still a separate responsibility.</a:t>
-            </a:r>
-          </a:p>
-          <a:p xmlns:a="http://schemas.openxmlformats.org/drawingml/2006/main">
-            <a:r>
-              <a:t/>
-            </a:r>
-          </a:p>
-          <a:p xmlns:a="http://schemas.openxmlformats.org/drawingml/2006/main">
-            <a:r>
-              <a:t>The notebook includes this as an explained reference fragment, not an executed cloud cell. Your required experiment runs locally. If you later try the MongoDB operation, use an initialized, disposable practice collection and inspect the matched and modified counts. A zero match has several possible meanings, which we examine next. There is deliberately no unconditional upsert option attached to this version-filtered update, because initialization requires a separate decision.</a:t>
-            </a:r>
-          </a:p>
-          <a:p xmlns:a="http://schemas.openxmlformats.org/drawingml/2006/main">
-            <a:r>
-              <a:t/>
-            </a:r>
-          </a:p>
+              <a:t>Here is what the version rule looks like as a real database operation. Read the updateOne.</a:t>
+            </a:r>
+          </a:p>
+          <a:p xmlns:a="http://schemas.openxmlformats.org/drawingml/2006/main"/>
+          <a:p xmlns:a="http://schemas.openxmlformats.org/drawingml/2006/main">
+            <a:r>
+              <a:t>The first object is the filter: underscore id 1008, and source_version less than 18, written as dollar lt 18. The second object is the update: dollar set status to closed, source_version to 18, and last_event_id to evt-1008-18.</a:t>
+            </a:r>
+          </a:p>
+          <a:p xmlns:a="http://schemas.openxmlformats.org/drawingml/2006/main"/>
+          <a:p xmlns:a="http://schemas.openxmlformats.org/drawingml/2006/main">
+            <a:r>
+              <a:t>Why does this matter? Because MongoDB checks the filter and changes the document in one atomic operation. Compare that with the Python loop on slide 12, where we read the version and then wrote it in two separate steps. With two workers, that gap is a race. Here there is no gap. A slow, delayed writer cannot sneak in and lower the version after a newer one has landed, because its filter simply will not match.</a:t>
+            </a:r>
+          </a:p>
+          <a:p xmlns:a="http://schemas.openxmlformats.org/drawingml/2006/main"/>
+          <a:p xmlns:a="http://schemas.openxmlformats.org/drawingml/2006/main">
+            <a:r>
+              <a:t>Be clear about the scope. This is one existing document. It does not coordinate PostgreSQL, a message broker, and every MongoDB document together. Acknowledging the queue message is still a separate job.</a:t>
+            </a:r>
+          </a:p>
+          <a:p xmlns:a="http://schemas.openxmlformats.org/drawingml/2006/main"/>
+          <a:p xmlns:a="http://schemas.openxmlformats.org/drawingml/2006/main">
+            <a:r>
+              <a:t>Read the small print. This is a reference for an existing practice document, and the notebook explains it but does not run it. Your required experiment stays local. If you try it later, use a disposable practice collection and look at the matched and modified counts.</a:t>
+            </a:r>
+          </a:p>
+          <a:p xmlns:a="http://schemas.openxmlformats.org/drawingml/2006/main"/>
+          <a:p xmlns:a="http://schemas.openxmlformats.org/drawingml/2006/main">
+            <a:r>
+              <a:t>And notice there is no upsert option on this command. That is on purpose, and the next slide explains why.</a:t>
+            </a:r>
+          </a:p>
+          <a:p xmlns:a="http://schemas.openxmlformats.org/drawingml/2006/main"/>
           <a:p xmlns:a="http://schemas.openxmlformats.org/drawingml/2006/main">
             <a:r>
               <a:t>[Sources]</a:t>
@@ -1402,44 +1340,40 @@
           <a:lstStyle xmlns:a="http://schemas.openxmlformats.org/drawingml/2006/main"/>
           <a:p xmlns:a="http://schemas.openxmlformats.org/drawingml/2006/main">
             <a:r>
-              <a:t>A matched count of zero tells us that no document satisfied the filter. It does not identify the reason by itself. If the document is already at version eighteen or later, the less-than-eighteen condition should fail. Ignoring that stale or duplicate event is the intended normal behavior.</a:t>
-            </a:r>
-          </a:p>
-          <a:p xmlns:a="http://schemas.openxmlformats.org/drawingml/2006/main">
-            <a:r>
-              <a:t/>
-            </a:r>
-          </a:p>
-          <a:p xmlns:a="http://schemas.openxmlformats.org/drawingml/2006/main">
-            <a:r>
-              <a:t>If the document is absent, there is nothing to update. We need an initialization policy, perhaps based on a verified complete source state. Treating this case as an ordinary already-applied event would leave the resident record missing.</a:t>
-            </a:r>
-          </a:p>
-          <a:p xmlns:a="http://schemas.openxmlformats.org/drawingml/2006/main">
-            <a:r>
-              <a:t/>
-            </a:r>
-          </a:p>
-          <a:p xmlns:a="http://schemas.openxmlformats.org/drawingml/2006/main">
-            <a:r>
-              <a:t>There is a third case that a version-only check cannot repair. A document might claim version eighteen but contain the wrong status. The filter still fails because its version is not older. Repeatedly sending the same event will not discover or correct that corrupted field under this rule. Reconciliation compares values as well as versions so we can investigate that mismatch deliberately.</a:t>
-            </a:r>
-          </a:p>
-          <a:p xmlns:a="http://schemas.openxmlformats.org/drawingml/2006/main">
-            <a:r>
-              <a:t/>
-            </a:r>
-          </a:p>
-          <a:p xmlns:a="http://schemas.openxmlformats.org/drawingml/2006/main">
-            <a:r>
-              <a:t>Adding upsert to every zero-match operation is unsafe here. An existing newer document can fail the version filter. An attempted insert using the same underscore-ID then conflicts with that existing document's identity. The command needs a defined response for an already-current record, an absent record, and incorrect equal-version data. Those are different states, so one unexamined retry option should not stand in for all three decisions.</a:t>
-            </a:r>
-          </a:p>
-          <a:p xmlns:a="http://schemas.openxmlformats.org/drawingml/2006/main">
-            <a:r>
-              <a:t/>
-            </a:r>
-          </a:p>
+              <a:t>Suppose the command from the last slide comes back with a matched count of zero. What does that mean? Nothing matched the filter. It does not tell you why. Look at the three rows.</a:t>
+            </a:r>
+          </a:p>
+          <a:p xmlns:a="http://schemas.openxmlformats.org/drawingml/2006/main"/>
+          <a:p xmlns:a="http://schemas.openxmlformats.org/drawingml/2006/main">
+            <a:r>
+              <a:t>First row: the document is already at version 18 or newer. The less-than-18 filter fails. That is the normal, healthy case. A duplicate or stale event has nothing newer to apply, so ignoring it is correct.</a:t>
+            </a:r>
+          </a:p>
+          <a:p xmlns:a="http://schemas.openxmlformats.org/drawingml/2006/main"/>
+          <a:p xmlns:a="http://schemas.openxmlformats.org/drawingml/2006/main">
+            <a:r>
+              <a:t>Second row: the document is absent. There is nothing to update. If you treat that like the first row, the resident record just stays missing. You need an initialization policy, ideally built from a verified complete source state.</a:t>
+            </a:r>
+          </a:p>
+          <a:p xmlns:a="http://schemas.openxmlformats.org/drawingml/2006/main"/>
+          <a:p xmlns:a="http://schemas.openxmlformats.org/drawingml/2006/main">
+            <a:r>
+              <a:t>Third row, the sneaky one: version 18 with the wrong status. The document claims to be current, but the value is wrong. The filter fails because the version is not older, so resending the event will never fix it. Only reconciliation, comparing values as well as versions, will find it.</a:t>
+            </a:r>
+          </a:p>
+          <a:p xmlns:a="http://schemas.openxmlformats.org/drawingml/2006/main"/>
+          <a:p xmlns:a="http://schemas.openxmlformats.org/drawingml/2006/main">
+            <a:r>
+              <a:t>Now read the warning box. The tempting fix is to add upsert, so that any zero match inserts a fresh document. But if a newer document with the same underscore id already exists, it fails the version filter, the upsert tries to insert, and that insert collides with the existing underscore id.</a:t>
+            </a:r>
+          </a:p>
+          <a:p xmlns:a="http://schemas.openxmlformats.org/drawingml/2006/main"/>
+          <a:p xmlns:a="http://schemas.openxmlformats.org/drawingml/2006/main">
+            <a:r>
+              <a:t>So three different states need three different decisions. One retry option cannot stand in for all of them.</a:t>
+            </a:r>
+          </a:p>
+          <a:p xmlns:a="http://schemas.openxmlformats.org/drawingml/2006/main"/>
           <a:p xmlns:a="http://schemas.openxmlformats.org/drawingml/2006/main">
             <a:r>
               <a:t>[Sources]</a:t>
@@ -1522,44 +1456,34 @@
           <a:lstStyle xmlns:a="http://schemas.openxmlformats.org/drawingml/2006/main"/>
           <a:p xmlns:a="http://schemas.openxmlformats.org/drawingml/2006/main">
             <a:r>
-              <a:t>The supplied incident records ticket one thousand eight at a specific observation point. At fourteen-oh-three and twelve seconds UTC, PostgreSQL commits resolved at source version seventeen, and the outbox contains event e-v-t one thousand eight seventeen. The relay later marks it published, and the consumer log separately records receiving that same event.</a:t>
-            </a:r>
-          </a:p>
-          <a:p xmlns:a="http://schemas.openxmlformats.org/drawingml/2006/main">
-            <a:r>
-              <a:t/>
-            </a:r>
-          </a:p>
-          <a:p xmlns:a="http://schemas.openxmlformats.org/drawingml/2006/main">
-            <a:r>
-              <a:t>The consumer then times out while writing the projection and queues a retry. At fourteen-oh-four, the retry worker pauses because its database credential has expired. A later read of the resident projection still shows open at version sixteen.</a:t>
-            </a:r>
-          </a:p>
-          <a:p xmlns:a="http://schemas.openxmlformats.org/drawingml/2006/main">
-            <a:r>
-              <a:t/>
-            </a:r>
-          </a:p>
-          <a:p xmlns:a="http://schemas.openxmlformats.org/drawingml/2006/main">
-            <a:r>
-              <a:t>These observations support a failure after receipt, with the retry path unable to make progress. The published timestamp alone would not prove that the consumer received or applied the event. Here we have the received-event log as an additional observation. Similarly, the timeout alone would not prove the write never happened. The later version comparison establishes that this inspected projection remains behind.</a:t>
-            </a:r>
-          </a:p>
-          <a:p xmlns:a="http://schemas.openxmlformats.org/drawingml/2006/main">
-            <a:r>
-              <a:t/>
-            </a:r>
-          </a:p>
-          <a:p xmlns:a="http://schemas.openxmlformats.org/drawingml/2006/main">
-            <a:r>
-              <a:t>We should not infer that every ticket is wrong or that only this ticket is affected. The paused worker may have a wider backlog. The next investigation would inspect other queued records or the worker's lag. Keep the paper incident's version seventeen distinct from the notebook's later accepted version eighteen. The experiment continues the state sequence to test delayed events, while the incident table preserves the earlier chronology.</a:t>
-            </a:r>
-          </a:p>
-          <a:p xmlns:a="http://schemas.openxmlformats.org/drawingml/2006/main">
-            <a:r>
-              <a:t/>
-            </a:r>
-          </a:p>
+              <a:t>Now the supplied incident. This is the paper incident in your lab, and it follows one event. All the times are UTC. Read down the timeline.</a:t>
+            </a:r>
+          </a:p>
+          <a:p xmlns:a="http://schemas.openxmlformats.org/drawingml/2006/main"/>
+          <a:p xmlns:a="http://schemas.openxmlformats.org/drawingml/2006/main">
+            <a:r>
+              <a:t>At 14:03:12, PostgreSQL commits resolved, version 17, and the outbox gets evt-1008-17. At 14:03:13, the relay marks the event published, and the consumer records that it received it. Then, between 14:03:13 and 14:03:14, the consumer times out writing the projection and queues a retry. At 14:04:00, the retry worker pauses, because its database credential has expired. At 14:04:05, a read of the resident projection still shows open, version 16.</a:t>
+            </a:r>
+          </a:p>
+          <a:p xmlns:a="http://schemas.openxmlformats.org/drawingml/2006/main"/>
+          <a:p xmlns:a="http://schemas.openxmlformats.org/drawingml/2006/main">
+            <a:r>
+              <a:t>So where did progress stop? After receipt. The consumer got the event. It could not write, and the retry path cannot make progress.</a:t>
+            </a:r>
+          </a:p>
+          <a:p xmlns:a="http://schemas.openxmlformats.org/drawingml/2006/main"/>
+          <a:p xmlns:a="http://schemas.openxmlformats.org/drawingml/2006/main">
+            <a:r>
+              <a:t>Notice what each piece of evidence proves. The published mark at 14:03:13 would not, on its own, prove the consumer received anything. We have the received log for that. The timeout alone would not prove the write failed. The later read at version 16 is what proves this projection is behind.</a:t>
+            </a:r>
+          </a:p>
+          <a:p xmlns:a="http://schemas.openxmlformats.org/drawingml/2006/main"/>
+          <a:p xmlns:a="http://schemas.openxmlformats.org/drawingml/2006/main">
+            <a:r>
+              <a:t>Read the box at the bottom. The record does not establish the state of every other ticket. A paused worker probably has a backlog, so do not assume only this ticket is affected, and do not assume everything is broken either. And keep this incident's version 17 separate from the notebook's version 18.</a:t>
+            </a:r>
+          </a:p>
+          <a:p xmlns:a="http://schemas.openxmlformats.org/drawingml/2006/main"/>
           <a:p xmlns:a="http://schemas.openxmlformats.org/drawingml/2006/main">
             <a:r>
               <a:t>[Sources]</a:t>
@@ -1637,44 +1561,40 @@
           <a:lstStyle xmlns:a="http://schemas.openxmlformats.org/drawingml/2006/main"/>
           <a:p xmlns:a="http://schemas.openxmlformats.org/drawingml/2006/main">
             <a:r>
-              <a:t>The first repair addresses the component that cannot progress. In this incident, that means restoring the consumer's approved database access and resuming the recorded work through its normal version-checked handler. We would make the credential change through the appropriate operational process, with the narrow access that this consumer actually needs.</a:t>
-            </a:r>
-          </a:p>
-          <a:p xmlns:a="http://schemas.openxmlformats.org/drawingml/2006/main">
-            <a:r>
-              <a:t/>
-            </a:r>
-          </a:p>
-          <a:p xmlns:a="http://schemas.openxmlformats.org/drawingml/2006/main">
-            <a:r>
-              <a:t>We would not change the authoritative PostgreSQL ticket back to open merely to make both screens agree. The staff update was valid and committed. Replacing it with the stale resident value would create agreement by discarding accepted work. Agreement alone is not the goal if we obtain it from the wrong source.</a:t>
-            </a:r>
-          </a:p>
-          <a:p xmlns:a="http://schemas.openxmlformats.org/drawingml/2006/main">
-            <a:r>
-              <a:t/>
-            </a:r>
-          </a:p>
-          <a:p xmlns:a="http://schemas.openxmlformats.org/drawingml/2006/main">
-            <a:r>
-              <a:t>After resuming delivery, compare the projection with the current authoritative state. If a newer accepted version has arrived meanwhile, the correct result may be newer than seventeen. We should not force every repaired record back to the earlier observation simply because that is the value in the incident report.</a:t>
-            </a:r>
-          </a:p>
-          <a:p xmlns:a="http://schemas.openxmlformats.org/drawingml/2006/main">
-            <a:r>
-              <a:t/>
-            </a:r>
-          </a:p>
-          <a:p xmlns:a="http://schemas.openxmlformats.org/drawingml/2006/main">
-            <a:r>
-              <a:t>Then broaden the check to other queued tickets or consumer lag. The same paused credential can affect more than the first visible complaint. If the repaired path behaves unexpectedly, preserve the observations and pause further changes while investigating. In today's paper incident you propose this operational repair. Your executed notebook results demonstrate the version rule locally. Keep the proposed production action and the experiment you actually ran distinct in the response.</a:t>
-            </a:r>
-          </a:p>
-          <a:p xmlns:a="http://schemas.openxmlformats.org/drawingml/2006/main">
-            <a:r>
-              <a:t/>
-            </a:r>
-          </a:p>
+              <a:t>So how do we fix it? Read the steps on the slide in order.</a:t>
+            </a:r>
+          </a:p>
+          <a:p xmlns:a="http://schemas.openxmlformats.org/drawingml/2006/main"/>
+          <a:p xmlns:a="http://schemas.openxmlformats.org/drawingml/2006/main">
+            <a:r>
+              <a:t>First, restore the consumer's approved access. The thing that cannot make progress is the retry worker with the expired credential, so that is what we fix, through the proper operational process, with only the narrow access this consumer needs. Then resume the recorded work through the normal version-checked handler. Then compare the resulting projection with the current source.</a:t>
+            </a:r>
+          </a:p>
+          <a:p xmlns:a="http://schemas.openxmlformats.org/drawingml/2006/main"/>
+          <a:p xmlns:a="http://schemas.openxmlformats.org/drawingml/2006/main">
+            <a:r>
+              <a:t>Now read the bottom box, because this is the mistake people make under pressure. Keep PostgreSQL's accepted status. You could make both screens agree instantly by setting the PostgreSQL ticket back to open. Agreement achieved. And you would have thrown away a staff member's valid, committed update. Agreement is not the goal if it comes from the wrong direction. The authority stays the authority.</a:t>
+            </a:r>
+          </a:p>
+          <a:p xmlns:a="http://schemas.openxmlformats.org/drawingml/2006/main"/>
+          <a:p xmlns:a="http://schemas.openxmlformats.org/drawingml/2006/main">
+            <a:r>
+              <a:t>Also, when you compare after the repair, the correct answer might be newer than 17. If another accepted update came in while the worker was paused, version 17 is no longer the target. Do not force the record back to the number in the incident report.</a:t>
+            </a:r>
+          </a:p>
+          <a:p xmlns:a="http://schemas.openxmlformats.org/drawingml/2006/main"/>
+          <a:p xmlns:a="http://schemas.openxmlformats.org/drawingml/2006/main">
+            <a:r>
+              <a:t>Then go wider: inspect other queued tickets or consumer lag. The same expired credential probably affected more than the first complaint.</a:t>
+            </a:r>
+          </a:p>
+          <a:p xmlns:a="http://schemas.openxmlformats.org/drawingml/2006/main"/>
+          <a:p xmlns:a="http://schemas.openxmlformats.org/drawingml/2006/main">
+            <a:r>
+              <a:t>In your write-up, this credential repair is a proposal. You did not perform it. What you actually ran is the notebook experiment. Keep those two clearly separate.</a:t>
+            </a:r>
+          </a:p>
+          <a:p xmlns:a="http://schemas.openxmlformats.org/drawingml/2006/main"/>
           <a:p xmlns:a="http://schemas.openxmlformats.org/drawingml/2006/main">
             <a:r>
               <a:t>[Sources]</a:t>
@@ -1752,44 +1672,34 @@
           <a:lstStyle xmlns:a="http://schemas.openxmlformats.org/drawingml/2006/main"/>
           <a:p xmlns:a="http://schemas.openxmlformats.org/drawingml/2006/main">
             <a:r>
-              <a:t>An authoritative record is the record whose accepted update establishes the business fact we are discussing. In this application, the staff operation changes ticket status in PostgreSQL. That is why we treat that row as authoritative for status. This is an application ownership decision, rather than an inherent rule that relational databases always outrank document databases.</a:t>
-            </a:r>
-          </a:p>
-          <a:p xmlns:a="http://schemas.openxmlformats.org/drawingml/2006/main">
-            <a:r>
-              <a:t/>
-            </a:r>
-          </a:p>
-          <a:p xmlns:a="http://schemas.openxmlformats.org/drawingml/2006/main">
-            <a:r>
-              <a:t>A projection is a derived representation arranged for a particular read. The resident page may need a compact document containing ticket details and the latest status. Keeping that representation separately can simplify a read, but someone must maintain it when the source changes. A copy advertised as current becomes misleading when it silently stops updating.</a:t>
-            </a:r>
-          </a:p>
-          <a:p xmlns:a="http://schemas.openxmlformats.org/drawingml/2006/main">
-            <a:r>
-              <a:t/>
-            </a:r>
-          </a:p>
-          <a:p xmlns:a="http://schemas.openxmlformats.org/drawingml/2006/main">
-            <a:r>
-              <a:t>The source version lets us compare accepted progress for the same ticket. Version seventeen follows version sixteen in this ticket's source sequence. It is not the time at which a consumer happened to receive a message. A consumer may receive an older event after a newer one.</a:t>
-            </a:r>
-          </a:p>
-          <a:p xmlns:a="http://schemas.openxmlformats.org/drawingml/2006/main">
-            <a:r>
-              <a:t/>
-            </a:r>
-          </a:p>
-          <a:p xmlns:a="http://schemas.openxmlformats.org/drawingml/2006/main">
-            <a:r>
-              <a:t>Ownership should be stated at the level of facts. PostgreSQL might own status while an object store owns attachment bytes and another system owns independent audit history. We could not reconstruct those bytes merely from a PostgreSQL filename. During repair, we therefore identify the field, its owner, and the direction of reconstruction before copying anything. That prevents a stale display value from accidentally becoming the new authority.</a:t>
-            </a:r>
-          </a:p>
-          <a:p xmlns:a="http://schemas.openxmlformats.org/drawingml/2006/main">
-            <a:r>
-              <a:t/>
-            </a:r>
-          </a:p>
+              <a:t>Three terms on this table, and the whole week leans on them.</a:t>
+            </a:r>
+          </a:p>
+          <a:p xmlns:a="http://schemas.openxmlformats.org/drawingml/2006/main"/>
+          <a:p xmlns:a="http://schemas.openxmlformats.org/drawingml/2006/main">
+            <a:r>
+              <a:t>The authoritative ticket is the record whose accepted update establishes the fact. When staff resolve a ticket, that update lands in PostgreSQL, so the PostgreSQL row is the authority for status. Now read the box at the bottom. This is a design choice. It is not a rule that relational databases outrank document databases. We decided it, and we wrote it down.</a:t>
+            </a:r>
+          </a:p>
+          <a:p xmlns:a="http://schemas.openxmlformats.org/drawingml/2006/main"/>
+          <a:p xmlns:a="http://schemas.openxmlformats.org/drawingml/2006/main">
+            <a:r>
+              <a:t>The resident projection is a derived copy, shaped for one particular read. The resident page wants one compact document with the ticket details and the latest status. That makes the read simple. The price is that somebody has to keep the copy up to date. And here is why that matters: a copy that silently stops updating does not look broken. It looks current. That is exactly what our resident is seeing.</a:t>
+            </a:r>
+          </a:p>
+          <a:p xmlns:a="http://schemas.openxmlformats.org/drawingml/2006/main"/>
+          <a:p xmlns:a="http://schemas.openxmlformats.org/drawingml/2006/main">
+            <a:r>
+              <a:t>The source version is the third row. It identifies the accepted order of updates for one ticket. Version 17 follows version 16. It is not the time a message happened to arrive, because messages can arrive out of order.</a:t>
+            </a:r>
+          </a:p>
+          <a:p xmlns:a="http://schemas.openxmlformats.org/drawingml/2006/main"/>
+          <a:p xmlns:a="http://schemas.openxmlformats.org/drawingml/2006/main">
+            <a:r>
+              <a:t>Why name an owner for each fact? Because during a repair you need to know which way to copy. If you copy in the wrong direction, the stale display value quietly becomes the new truth.</a:t>
+            </a:r>
+          </a:p>
+          <a:p xmlns:a="http://schemas.openxmlformats.org/drawingml/2006/main"/>
           <a:p xmlns:a="http://schemas.openxmlformats.org/drawingml/2006/main">
             <a:r>
               <a:t>[Sources]</a:t>
@@ -1867,54 +1777,40 @@
           <a:lstStyle xmlns:a="http://schemas.openxmlformats.org/drawingml/2006/main"/>
           <a:p xmlns:a="http://schemas.openxmlformats.org/drawingml/2006/main">
             <a:r>
-              <a:t>After the guarded experiment, ticket one thousand eight matches its later authoritative state: closed at version eighteen. We now inspect more than that one ticket. The source contains three records, and the resident projection also contains three records. A simple count comparison passes.</a:t>
-            </a:r>
-          </a:p>
-          <a:p xmlns:a="http://schemas.openxmlformats.org/drawingml/2006/main">
-            <a:r>
-              <a:t/>
-            </a:r>
-          </a:p>
-          <a:p xmlns:a="http://schemas.openxmlformats.org/drawingml/2006/main">
-            <a:r>
-              <a:t>Looking at identifiers reveals that ticket one thousand nine is missing from the projection. Ticket nine thousand nine hundred ninety-nine appears only in the projection. Those differences cancel in the total, so an equal count cannot identify them.</a:t>
-            </a:r>
-          </a:p>
-          <a:p xmlns:a="http://schemas.openxmlformats.org/drawingml/2006/main">
-            <a:r>
-              <a:t/>
-            </a:r>
-          </a:p>
-          <a:p xmlns:a="http://schemas.openxmlformats.org/drawingml/2006/main">
-            <a:r>
-              <a:t>Ticket one thousand ten has a different problem. Both sides show version seven, but the source status is resolved while the resident status is open. Comparing versions alone would miss that wrong value. Reconciliation therefore considers the union of identifiers and compares the source-owned status and version fields for each relevant ticket.</a:t>
-            </a:r>
-          </a:p>
-          <a:p xmlns:a="http://schemas.openxmlformats.org/drawingml/2006/main">
-            <a:r>
-              <a:t/>
-            </a:r>
-          </a:p>
-          <a:p xmlns:a="http://schemas.openxmlformats.org/drawingml/2006/main">
-            <a:r>
-              <a:t>The notebook reports three records needing investigation after the guard has been restored. If you leave the guard broken with version sixteen arriving last, ticket one thousand eight adds a fourth discrepancy. This connects the event-order experiment to the broader comparison rather than treating them as unrelated exercises.</a:t>
-            </a:r>
-          </a:p>
-          <a:p xmlns:a="http://schemas.openxmlformats.org/drawingml/2006/main">
-            <a:r>
-              <a:t/>
-            </a:r>
-          </a:p>
-          <a:p xmlns:a="http://schemas.openxmlformats.org/drawingml/2006/main">
-            <a:r>
-              <a:t>We do not compare projection-only processing metadata as though it were another authoritative business field. The last event identifier has a different purpose. A useful reconciliation check states which fields it owns and what equality means after any necessary representation conversions.</a:t>
-            </a:r>
-          </a:p>
-          <a:p xmlns:a="http://schemas.openxmlformats.org/drawingml/2006/main">
-            <a:r>
-              <a:t/>
-            </a:r>
-          </a:p>
+              <a:t>Now we zoom out from one ticket to several. These are still the notebook's synthetic tickets. Look at the table.</a:t>
+            </a:r>
+          </a:p>
+          <a:p xmlns:a="http://schemas.openxmlformats.org/drawingml/2006/main"/>
+          <a:p xmlns:a="http://schemas.openxmlformats.org/drawingml/2006/main">
+            <a:r>
+              <a:t>Ticket 1008: closed, 18 on both sides. After the guarded experiment, it matches. Good. Now count the rows. The source has three records. The resident projection has three records. A simple count check passes. Read the box: three source records, three resident records, three discrepancies.</a:t>
+            </a:r>
+          </a:p>
+          <a:p xmlns:a="http://schemas.openxmlformats.org/drawingml/2006/main"/>
+          <a:p xmlns:a="http://schemas.openxmlformats.org/drawingml/2006/main">
+            <a:r>
+              <a:t>Ticket 1009: resolved, version 5 in the source, absent from the projection. It is missing. Ticket 9999: absent from the source, open, version 1 in the projection. It is an extra record with no source. One missing plus one extra, and the count comes out even. That is why equal counts tell you almost nothing.</a:t>
+            </a:r>
+          </a:p>
+          <a:p xmlns:a="http://schemas.openxmlformats.org/drawingml/2006/main"/>
+          <a:p xmlns:a="http://schemas.openxmlformats.org/drawingml/2006/main">
+            <a:r>
+              <a:t>Ticket 1010 is the nasty one. Both sides say version 7, but the source says resolved and the resident says open. If you only compared versions, you would miss it. This is the third row from slide 17, a wrong value at an equal version.</a:t>
+            </a:r>
+          </a:p>
+          <a:p xmlns:a="http://schemas.openxmlformats.org/drawingml/2006/main"/>
+          <a:p xmlns:a="http://schemas.openxmlformats.org/drawingml/2006/main">
+            <a:r>
+              <a:t>So the second line of the box is the method. Compare the union of IDs from both sides, and compare the source-owned fields, status and version, for each one.</a:t>
+            </a:r>
+          </a:p>
+          <a:p xmlns:a="http://schemas.openxmlformats.org/drawingml/2006/main"/>
+          <a:p xmlns:a="http://schemas.openxmlformats.org/drawingml/2006/main">
+            <a:r>
+              <a:t>The notebook reports three findings with the guard restored. If you leave the guard off with version 16 last, 1008 becomes a fourth. We do not compare last_event_id, because that is processing metadata, not a business fact.</a:t>
+            </a:r>
+          </a:p>
+          <a:p xmlns:a="http://schemas.openxmlformats.org/drawingml/2006/main"/>
           <a:p xmlns:a="http://schemas.openxmlformats.org/drawingml/2006/main">
             <a:r>
               <a:t>[Sources]</a:t>
@@ -1992,44 +1888,40 @@
           <a:lstStyle xmlns:a="http://schemas.openxmlformats.org/drawingml/2006/main"/>
           <a:p xmlns:a="http://schemas.openxmlformats.org/drawingml/2006/main">
             <a:r>
-              <a:t>The small model rebuilds a separate candidate using the authoritative records. Each ticket identifier becomes a key in the new dictionary, and the source-owned fields are copied into that candidate. The source itself stays unchanged. This makes the repair direction explicit.</a:t>
-            </a:r>
-          </a:p>
-          <a:p xmlns:a="http://schemas.openxmlformats.org/drawingml/2006/main">
-            <a:r>
-              <a:t/>
-            </a:r>
-          </a:p>
-          <a:p xmlns:a="http://schemas.openxmlformats.org/drawingml/2006/main">
-            <a:r>
-              <a:t>The first comparison checks that the sets of identifiers agree. The second compares the owned field values for those identifiers. Both return True for this candidate. The full notebook also reports an empty remaining-mismatch list. These observations are stronger than merely noticing that the two dictionaries have the same number of entries.</a:t>
-            </a:r>
-          </a:p>
-          <a:p xmlns:a="http://schemas.openxmlformats.org/drawingml/2006/main">
-            <a:r>
-              <a:t/>
-            </a:r>
-          </a:p>
-          <a:p xmlns:a="http://schemas.openxmlformats.org/drawingml/2006/main">
-            <a:r>
-              <a:t>This code constructs and checks an in-memory candidate. It does not perform a safe production cutover. A live source may continue accepting writes while a rebuild runs. A projection may contain independently owned annotations that a wholesale replacement would erase. Readers need a controlled way to switch to the verified candidate, and rollback needs its own plan.</a:t>
-            </a:r>
-          </a:p>
-          <a:p xmlns:a="http://schemas.openxmlformats.org/drawingml/2006/main">
-            <a:r>
-              <a:t/>
-            </a:r>
-          </a:p>
-          <a:p xmlns:a="http://schemas.openxmlformats.org/drawingml/2006/main">
-            <a:r>
-              <a:t>An unexpected projection identifier also deserves investigation before deletion. It may reflect an ownership mistake, a deleted source record, or a different lifecycle policy. In our synthetic fixture the intended source is fully specified, so the comparison is straightforward. In a real system, the ownership and deletion rules must come first. The transferable skill is identifying the authoritative direction and validating a candidate without casually overwriting either the source or a live derived store.</a:t>
-            </a:r>
-          </a:p>
-          <a:p xmlns:a="http://schemas.openxmlformats.org/drawingml/2006/main">
-            <a:r>
-              <a:t/>
-            </a:r>
-          </a:p>
+              <a:t>So how do we repair the projection? Not by patching it in place. We build a separate candidate from the authority. Read the code.</a:t>
+            </a:r>
+          </a:p>
+          <a:p xmlns:a="http://schemas.openxmlformats.org/drawingml/2006/main"/>
+          <a:p xmlns:a="http://schemas.openxmlformats.org/drawingml/2006/main">
+            <a:r>
+              <a:t>rebuilt_records is a new dictionary. For each ticket_id and its fields in source_records, we copy the fields in. The source is only read, never changed. That is the point of this slide: the repair direction is explicit. Data flows from the authority into a new candidate.</a:t>
+            </a:r>
+          </a:p>
+          <a:p xmlns:a="http://schemas.openxmlformats.org/drawingml/2006/main"/>
+          <a:p xmlns:a="http://schemas.openxmlformats.org/drawingml/2006/main">
+            <a:r>
+              <a:t>Then two prints. The first checks that the set of IDs matches the source. The second checks that the field values match. Read the result line: both comparisons return True, and the source stays unchanged.</a:t>
+            </a:r>
+          </a:p>
+          <a:p xmlns:a="http://schemas.openxmlformats.org/drawingml/2006/main"/>
+          <a:p xmlns:a="http://schemas.openxmlformats.org/drawingml/2006/main">
+            <a:r>
+              <a:t>Let me be honest about what that proves. We built the candidate by copying the source, so of course it matches. The check cannot really fail here. It also does not fix the three discrepancies in the existing resident records, because it never touches them. What it shows is the pattern: build from the authority, verify the candidate, and leave both the source and the live copy alone while you do it.</a:t>
+            </a:r>
+          </a:p>
+          <a:p xmlns:a="http://schemas.openxmlformats.org/drawingml/2006/main"/>
+          <a:p xmlns:a="http://schemas.openxmlformats.org/drawingml/2006/main">
+            <a:r>
+              <a:t>Read the limit box. A real rebuild must keep fields the projection owns separately, handle new writes that arrive during the rebuild, and switch readers over safely. This model does none of that cutover.</a:t>
+            </a:r>
+          </a:p>
+          <a:p xmlns:a="http://schemas.openxmlformats.org/drawingml/2006/main"/>
+          <a:p xmlns:a="http://schemas.openxmlformats.org/drawingml/2006/main">
+            <a:r>
+              <a:t>And ticket 9999, the extra record? Investigate it before you delete it. It might be a deleted source record or an ownership mistake.</a:t>
+            </a:r>
+          </a:p>
+          <a:p xmlns:a="http://schemas.openxmlformats.org/drawingml/2006/main"/>
           <a:p xmlns:a="http://schemas.openxmlformats.org/drawingml/2006/main">
             <a:r>
               <a:t>[Sources]</a:t>
@@ -2107,44 +1999,40 @@
           <a:lstStyle xmlns:a="http://schemas.openxmlformats.org/drawingml/2006/main"/>
           <a:p xmlns:a="http://schemas.openxmlformats.org/drawingml/2006/main">
             <a:r>
-              <a:t>Your submission is one short Brightspace text response. Explain the resident-facing impact, identify where progress stopped in the supplied incident, and propose a repair that respects the source of ticket status. Then include the final status and version you observed in the broken and repaired notebook runs.</a:t>
-            </a:r>
-          </a:p>
-          <a:p xmlns:a="http://schemas.openxmlformats.org/drawingml/2006/main">
-            <a:r>
-              <a:t/>
-            </a:r>
-          </a:p>
-          <a:p xmlns:a="http://schemas.openxmlformats.org/drawingml/2006/main">
-            <a:r>
-              <a:t>The writing combines diagnosis with a small executed experiment. It should be understandable to a colleague who needs to know what is affected and what should happen next. A list of product names is less useful than a clear explanation that the source has accepted a newer status while the consumer cannot advance the resident copy.</a:t>
-            </a:r>
-          </a:p>
-          <a:p xmlns:a="http://schemas.openxmlformats.org/drawingml/2006/main">
-            <a:r>
-              <a:t/>
-            </a:r>
-          </a:p>
-          <a:p xmlns:a="http://schemas.openxmlformats.org/drawingml/2006/main">
-            <a:r>
-              <a:t>Name one broader check before closing the incident. You could inspect other queued tickets or the consumer's lag. Explain why that check relates to the paused worker rather than adding an unrelated metric. You do not need a separate timeline, a matrix of five checks, or a notebook attachment.</a:t>
-            </a:r>
-          </a:p>
-          <a:p xmlns:a="http://schemas.openxmlformats.org/drawingml/2006/main">
-            <a:r>
-              <a:t/>
-            </a:r>
-          </a:p>
-          <a:p xmlns:a="http://schemas.openxmlformats.org/drawingml/2006/main">
-            <a:r>
-              <a:t>Be precise about the status of each action. The supplied record supports your diagnosis. The notebook supplies the broken and repaired local results. The production credential repair is a proposed action, not something you performed in a real incident. That distinction makes the response more useful and more credible. Work individually, using your own observed results, and keep the notebook as working material you can return to when discussing the concept later.</a:t>
-            </a:r>
-          </a:p>
-          <a:p xmlns:a="http://schemas.openxmlformats.org/drawingml/2006/main">
-            <a:r>
-              <a:t/>
-            </a:r>
-          </a:p>
+              <a:t>Here is what you hand in. One Brightspace text response, and it is short.</a:t>
+            </a:r>
+          </a:p>
+          <a:p xmlns:a="http://schemas.openxmlformats.org/drawingml/2006/main"/>
+          <a:p xmlns:a="http://schemas.openxmlformats.org/drawingml/2006/main">
+            <a:r>
+              <a:t>Read the first box. Explain the user impact: what does the resident see, and why does it matter? Say where progress stopped in the supplied incident. Propose a repair that respects which system owns ticket status. Then include the final status and version you observed in your broken run and your repaired run. Those come from your own notebook, not from my slides.</a:t>
+            </a:r>
+          </a:p>
+          <a:p xmlns:a="http://schemas.openxmlformats.org/drawingml/2006/main"/>
+          <a:p xmlns:a="http://schemas.openxmlformats.org/drawingml/2006/main">
+            <a:r>
+              <a:t>Then name one broader check before closing the incident, such as other queued tickets or the consumer's lag, and say why that check follows from a paused worker. Do not just add a random metric.</a:t>
+            </a:r>
+          </a:p>
+          <a:p xmlns:a="http://schemas.openxmlformats.org/drawingml/2006/main"/>
+          <a:p xmlns:a="http://schemas.openxmlformats.org/drawingml/2006/main">
+            <a:r>
+              <a:t>Write it for a colleague who needs to know what is affected and what happens next. A list of product names does not help them. A sentence like "the source accepted a newer status, and the consumer cannot advance the resident copy" does.</a:t>
+            </a:r>
+          </a:p>
+          <a:p xmlns:a="http://schemas.openxmlformats.org/drawingml/2006/main"/>
+          <a:p xmlns:a="http://schemas.openxmlformats.org/drawingml/2006/main">
+            <a:r>
+              <a:t>Be precise about what kind of claim each sentence makes. The supplied record supports your diagnosis. Your notebook supplies the broken and repaired results. The credential repair is a proposal, not something you did in production. Keeping those straight makes the update more credible, not less.</a:t>
+            </a:r>
+          </a:p>
+          <a:p xmlns:a="http://schemas.openxmlformats.org/drawingml/2006/main"/>
+          <a:p xmlns:a="http://schemas.openxmlformats.org/drawingml/2006/main">
+            <a:r>
+              <a:t>Read the bottom box. Work individually. No notebook attachment, no separate timeline, and no five-check matrix. One clear incident update.</a:t>
+            </a:r>
+          </a:p>
+          <a:p xmlns:a="http://schemas.openxmlformats.org/drawingml/2006/main"/>
           <a:p xmlns:a="http://schemas.openxmlformats.org/drawingml/2006/main">
             <a:r>
               <a:t>[Sources]</a:t>
@@ -2222,44 +2110,34 @@
           <a:lstStyle xmlns:a="http://schemas.openxmlformats.org/drawingml/2006/main"/>
           <a:p xmlns:a="http://schemas.openxmlformats.org/drawingml/2006/main">
             <a:r>
-              <a:t>Today we apply the same operational reasoning to your final project. A query that returns an answer is an important beginning. The next step is explaining how the data is represented, which identity can use it, how an important operation behaves, and what would happen if the data had to be restored.</a:t>
-            </a:r>
-          </a:p>
-          <a:p xmlns:a="http://schemas.openxmlformats.org/drawingml/2006/main">
-            <a:r>
-              <a:t/>
-            </a:r>
-          </a:p>
-          <a:p xmlns:a="http://schemas.openxmlformats.org/drawingml/2006/main">
-            <a:r>
-              <a:t>You already have a canonical final-project assignment and rubric. We will use that document instead of introducing a new project or another submission list. Your notebook, script, and project guide can remain the same package. A one-platform PostgreSQL or MongoDB project remains a valid choice.</a:t>
-            </a:r>
-          </a:p>
-          <a:p xmlns:a="http://schemas.openxmlformats.org/drawingml/2006/main">
-            <a:r>
-              <a:t/>
-            </a:r>
-          </a:p>
-          <a:p xmlns:a="http://schemas.openxmlformats.org/drawingml/2006/main">
-            <a:r>
-              <a:t>The incident lesson gives us a method for this clinic. Identify the fact or operation that matters, locate the current state, choose a specific check, and explain what the result supports. A missing permission test is different from a broken query. A backup file is different from a demonstrated restore. Naming the gap clearly helps you spend the class period on the work that will make the project more reliable.</a:t>
-            </a:r>
-          </a:p>
-          <a:p xmlns:a="http://schemas.openxmlformats.org/drawingml/2006/main">
-            <a:r>
-              <a:t/>
-            </a:r>
-          </a:p>
-          <a:p xmlns:a="http://schemas.openxmlformats.org/drawingml/2006/main">
-            <a:r>
-              <a:t>We will review access, index evaluation, recovery, and demonstration choices before you work individually. You do not need to add a second database or a polished application interface. Focus on a small system whose decisions and limitations you can explain. If a cloud connection fails during a demonstration, saved, clearly labeled results can still support a useful technical discussion while you describe the current connection problem honestly.</a:t>
-            </a:r>
-          </a:p>
-          <a:p xmlns:a="http://schemas.openxmlformats.org/drawingml/2006/main">
-            <a:r>
-              <a:t/>
-            </a:r>
-          </a:p>
+              <a:t>Welcome back. Today is Day 2, the Final Project Operations Clinic. Read the line in the middle. A useful query runs. The next task is to make its operation understandable.</a:t>
+            </a:r>
+          </a:p>
+          <a:p xmlns:a="http://schemas.openxmlformats.org/drawingml/2006/main"/>
+          <a:p xmlns:a="http://schemas.openxmlformats.org/drawingml/2006/main">
+            <a:r>
+              <a:t>Getting a query to return an answer is a real milestone. But a working database has to answer other questions too. Who is allowed to use this data? How does an important operation behave? What happens if we have to restore it? Today you take one of those questions for your own project and close it.</a:t>
+            </a:r>
+          </a:p>
+          <a:p xmlns:a="http://schemas.openxmlformats.org/drawingml/2006/main"/>
+          <a:p xmlns:a="http://schemas.openxmlformats.org/drawingml/2006/main">
+            <a:r>
+              <a:t>Read the bottom box. Use the model, queries, and project guide you already have. The final-project assignment and its rubric are the requirements source. I am not adding a new project or another submission list. And a one-platform project, PostgreSQL only or MongoDB only, is still a completely valid choice.</a:t>
+            </a:r>
+          </a:p>
+          <a:p xmlns:a="http://schemas.openxmlformats.org/drawingml/2006/main"/>
+          <a:p xmlns:a="http://schemas.openxmlformats.org/drawingml/2006/main">
+            <a:r>
+              <a:t>Here is the method, and it is the same one we used on the incident. Name the fact or operation that matters. Find its current state. Pick a specific check. Say what the result supports. A missing permission test is a different gap from a broken query. A backup file is different from a restore you have actually checked.</a:t>
+            </a:r>
+          </a:p>
+          <a:p xmlns:a="http://schemas.openxmlformats.org/drawingml/2006/main"/>
+          <a:p xmlns:a="http://schemas.openxmlformats.org/drawingml/2006/main">
+            <a:r>
+              <a:t>We will walk through access, indexes, recovery, and demonstration choices, and then you will work individually. You do not need a second database or a polished interface. You need a small system you can explain, limits included.</a:t>
+            </a:r>
+          </a:p>
+          <a:p xmlns:a="http://schemas.openxmlformats.org/drawingml/2006/main"/>
           <a:p xmlns:a="http://schemas.openxmlformats.org/drawingml/2006/main">
             <a:r>
               <a:t>[Sources]</a:t>
@@ -2337,44 +2215,40 @@
           <a:lstStyle xmlns:a="http://schemas.openxmlformats.org/drawingml/2006/main"/>
           <a:p xmlns:a="http://schemas.openxmlformats.org/drawingml/2006/main">
             <a:r>
-              <a:t>An access test is meaningful only when we know which identity performed it. An administrator successfully reading a record establishes that the administrator can read it. It does not show that the intended application reader has the same permitted path or that the reader is prevented from performing a forbidden action.</a:t>
-            </a:r>
-          </a:p>
-          <a:p xmlns:a="http://schemas.openxmlformats.org/drawingml/2006/main">
-            <a:r>
-              <a:t/>
-            </a:r>
-          </a:p>
-          <a:p xmlns:a="http://schemas.openxmlformats.org/drawingml/2006/main">
-            <a:r>
-              <a:t>For a least-privilege claim, test the operation using the identity whose boundary you intend to describe. A reader should be able to perform the allowed read. A forbidden write should fail for the expected permission reason. Use disposable project data and inspect the actual result rather than interpreting any error as a successful security test.</a:t>
-            </a:r>
-          </a:p>
-          <a:p xmlns:a="http://schemas.openxmlformats.org/drawingml/2006/main">
-            <a:r>
-              <a:t/>
-            </a:r>
-          </a:p>
-          <a:p xmlns:a="http://schemas.openxmlformats.org/drawingml/2006/main">
-            <a:r>
-              <a:t>Integrity rules answer a different question. A constraint or validator can reject an invalid value even for an identity that is otherwise allowed to write. That tests a data rule, not necessarily authorization. Both kinds of protection matter, but they should not be described interchangeably.</a:t>
-            </a:r>
-          </a:p>
-          <a:p xmlns:a="http://schemas.openxmlformats.org/drawingml/2006/main">
-            <a:r>
-              <a:t/>
-            </a:r>
-          </a:p>
-          <a:p xmlns:a="http://schemas.openxmlformats.org/drawingml/2006/main">
-            <a:r>
-              <a:t>In Supabase, remember that an administrative SQL session is not the same as an authenticated application's row-level access path. In Atlas, an account that manages the project is not automatically the database user in a driver's connection string. Use the course's earlier access material when choosing the appropriate identity. Never display or submit privileged credentials as part of the explanation. The result should name the role, attempted action, and observed boundary without exposing the secret that authenticated the test.</a:t>
-            </a:r>
-          </a:p>
-          <a:p xmlns:a="http://schemas.openxmlformats.org/drawingml/2006/main">
-            <a:r>
-              <a:t/>
-            </a:r>
-          </a:p>
+              <a:t>First, access. An access test means something only if you know which identity ran it. Look at the table.</a:t>
+            </a:r>
+          </a:p>
+          <a:p xmlns:a="http://schemas.openxmlformats.org/drawingml/2006/main"/>
+          <a:p xmlns:a="http://schemas.openxmlformats.org/drawingml/2006/main">
+            <a:r>
+              <a:t>First row: the administrator reads a record. That proves the administrator has access, which we already knew. It tells you nothing about the application's reader. This is the most common mistake I see in projects. Everything is tested as the admin, so everything passes.</a:t>
+            </a:r>
+          </a:p>
+          <a:p xmlns:a="http://schemas.openxmlformats.org/drawingml/2006/main"/>
+          <a:p xmlns:a="http://schemas.openxmlformats.org/drawingml/2006/main">
+            <a:r>
+              <a:t>Second row: the intended reader reads an allowed record. Now you have shown the read path works for the identity that actually uses it. Third row: the intended reader attempts a forbidden write, and it is denied for the expected permission reason. That is the other half. You need both, the allow and the deny, the same idea from Week 6.</a:t>
+            </a:r>
+          </a:p>
+          <a:p xmlns:a="http://schemas.openxmlformats.org/drawingml/2006/main"/>
+          <a:p xmlns:a="http://schemas.openxmlformats.org/drawingml/2006/main">
+            <a:r>
+              <a:t>The fourth row is a different thing. An invalid value fails a constraint. That is an integrity rule rejecting bad data. It says nothing about who may access the table. Both protections matter, but do not describe one as the other.</a:t>
+            </a:r>
+          </a:p>
+          <a:p xmlns:a="http://schemas.openxmlformats.org/drawingml/2006/main"/>
+          <a:p xmlns:a="http://schemas.openxmlformats.org/drawingml/2006/main">
+            <a:r>
+              <a:t>Two platform notes. In Supabase, the admin SQL editor is not the same as an authenticated user going through row-level security. In Atlas, the account that manages the project is not automatically the database user in your connection string.</a:t>
+            </a:r>
+          </a:p>
+          <a:p xmlns:a="http://schemas.openxmlformats.org/drawingml/2006/main"/>
+          <a:p xmlns:a="http://schemas.openxmlformats.org/drawingml/2006/main">
+            <a:r>
+              <a:t>Read the bottom box. Use disposable project data, and keep passwords, connection strings, and privileged service keys out of the demo. Name the role, the action, and the result. Never the secret.</a:t>
+            </a:r>
+          </a:p>
+          <a:p xmlns:a="http://schemas.openxmlformats.org/drawingml/2006/main"/>
           <a:p xmlns:a="http://schemas.openxmlformats.org/drawingml/2006/main">
             <a:r>
               <a:t>[Sources]</a:t>
@@ -2462,44 +2336,34 @@
           <a:lstStyle xmlns:a="http://schemas.openxmlformats.org/drawingml/2006/main"/>
           <a:p xmlns:a="http://schemas.openxmlformats.org/drawingml/2006/main">
             <a:r>
-              <a:t>An index decision begins with a query and a workload. Our example is finding a resident's recent open tickets. The relevant filter fields and sort order tell us what the database needs to locate and order. An index name by itself does not explain why that structure is useful.</a:t>
-            </a:r>
-          </a:p>
-          <a:p xmlns:a="http://schemas.openxmlformats.org/drawingml/2006/main">
-            <a:r>
-              <a:t/>
-            </a:r>
-          </a:p>
-          <a:p xmlns:a="http://schemas.openxmlformats.org/drawingml/2006/main">
-            <a:r>
-              <a:t>When comparing before and after, keep the query parameters and dataset fixed. Confirm that the returned rows or documents still answer the same question. Then inspect the chosen plan and the amount of examined work. In PostgreSQL, distinguish the planner's estimates from actual execution measurements. In MongoDB, distinguish returned documents from examined documents and keys when the plan provides those statistics.</a:t>
-            </a:r>
-          </a:p>
-          <a:p xmlns:a="http://schemas.openxmlformats.org/drawingml/2006/main">
-            <a:r>
-              <a:t/>
-            </a:r>
-          </a:p>
-          <a:p xmlns:a="http://schemas.openxmlformats.org/drawingml/2006/main">
-            <a:r>
-              <a:t>A small fixture can legitimately use a scan. That is an observation to explain, not a reason to invent a large speedup. Timing can change with caching and other activity, so a single faster run is weak support for a broad performance claim. Describe the environment and method if you report a measurement.</a:t>
-            </a:r>
-          </a:p>
-          <a:p xmlns:a="http://schemas.openxmlformats.org/drawingml/2006/main">
-            <a:r>
-              <a:t/>
-            </a:r>
-          </a:p>
-          <a:p xmlns:a="http://schemas.openxmlformats.org/drawingml/2006/main">
-            <a:r>
-              <a:t>The index also requires storage and maintenance during writes. Your project explanation should connect that cost to a useful access pattern. During the clinic, you can improve an existing index explanation by adding the exact query, the observed plan, and a limitation. You do not need a new benchmarking framework or a paid cluster to make that reasoning specific.</a:t>
-            </a:r>
-          </a:p>
-          <a:p xmlns:a="http://schemas.openxmlformats.org/drawingml/2006/main">
-            <a:r>
-              <a:t/>
-            </a:r>
-          </a:p>
+              <a:t>Next, indexes. Read the top line: an index decision begins with one query. Our example workload is finding a resident's recent open tickets. The filter fields and the sort order tell you what the database has to find and how it has to order it. An index name alone does not explain why the index helps.</a:t>
+            </a:r>
+          </a:p>
+          <a:p xmlns:a="http://schemas.openxmlformats.org/drawingml/2006/main"/>
+          <a:p xmlns:a="http://schemas.openxmlformats.org/drawingml/2006/main">
+            <a:r>
+              <a:t>Look at the two columns. On the left is what you keep fixed: the filter, the sort, the dataset, the returned rows, the exact parameters, and the environment and how you measured. If any of those change between before and after, you are not comparing anything.</a:t>
+            </a:r>
+          </a:p>
+          <a:p xmlns:a="http://schemas.openxmlformats.org/drawingml/2006/main"/>
+          <a:p xmlns:a="http://schemas.openxmlformats.org/drawingml/2006/main">
+            <a:r>
+              <a:t>On the right is what you compare: the selected plan, how much work was examined, which index fields support the filter and the order, and any timing, with its limits. In PostgreSQL, tell the planner's estimates apart from the actual execution numbers. In MongoDB, tell documents returned apart from documents and keys examined.</a:t>
+            </a:r>
+          </a:p>
+          <a:p xmlns:a="http://schemas.openxmlformats.org/drawingml/2006/main"/>
+          <a:p xmlns:a="http://schemas.openxmlformats.org/drawingml/2006/main">
+            <a:r>
+              <a:t>Read the bottom box. A small collection can legitimately use a scan. That is not a failure. It is an observation to explain, and it is better than inventing a speedup. A single faster run is weak evidence, because caching changes timings.</a:t>
+            </a:r>
+          </a:p>
+          <a:p xmlns:a="http://schemas.openxmlformats.org/drawingml/2006/main"/>
+          <a:p xmlns:a="http://schemas.openxmlformats.org/drawingml/2006/main">
+            <a:r>
+              <a:t>Also record the cost. Every index takes storage and adds work to every write. In the clinic, an easy improvement is adding the exact query, the observed plan, and one limitation to an index explanation you already have.</a:t>
+            </a:r>
+          </a:p>
+          <a:p xmlns:a="http://schemas.openxmlformats.org/drawingml/2006/main"/>
           <a:p xmlns:a="http://schemas.openxmlformats.org/drawingml/2006/main">
             <a:r>
               <a:t>[Sources]</a:t>
@@ -2587,54 +2451,34 @@
           <a:lstStyle xmlns:a="http://schemas.openxmlformats.org/drawingml/2006/main"/>
           <a:p xmlns:a="http://schemas.openxmlformats.org/drawingml/2006/main">
             <a:r>
-              <a:t>A backup command and a restore test answer different questions. A command may create an artifact successfully, but we still need to know what that artifact contains and whether the recovery procedure can recreate useful data and behavior in a separate target.</a:t>
-            </a:r>
-          </a:p>
-          <a:p xmlns:a="http://schemas.openxmlformats.org/drawingml/2006/main">
-            <a:r>
-              <a:t/>
-            </a:r>
-          </a:p>
-          <a:p xmlns:a="http://schemas.openxmlformats.org/drawingml/2006/main">
-            <a:r>
-              <a:t>The first checks compare expected identifiers and selected field values. A familiar query then tests whether the restored data supports an operation that matters to the application. Matching counts alone can hide the same kinds of differences we saw in the projection experiment.</a:t>
-            </a:r>
-          </a:p>
-          <a:p xmlns:a="http://schemas.openxmlformats.org/drawingml/2006/main">
-            <a:r>
-              <a:t/>
-            </a:r>
-          </a:p>
-          <a:p xmlns:a="http://schemas.openxmlformats.org/drawingml/2006/main">
-            <a:r>
-              <a:t>Next inspect required database objects and access behavior. A CSV or JSON data export does not automatically contain every index, constraint, validator, role, or policy. A logical dump's scope also depends on the tool and options. If an object requires a separate recreation step, put that step in the existing project guide rather than implying that the data file includes it.</a:t>
-            </a:r>
-          </a:p>
-          <a:p xmlns:a="http://schemas.openxmlformats.org/drawingml/2006/main">
-            <a:r>
-              <a:t/>
-            </a:r>
-          </a:p>
-          <a:p xmlns:a="http://schemas.openxmlformats.org/drawingml/2006/main">
-            <a:r>
-              <a:t>Record the command and observed elapsed time when you actually execute the restore. That observation describes one run under particular conditions. It does not guarantee a future recovery-time objective under a larger workload or an incident.</a:t>
-            </a:r>
-          </a:p>
-          <a:p xmlns:a="http://schemas.openxmlformats.org/drawingml/2006/main">
-            <a:r>
-              <a:t/>
-            </a:r>
-          </a:p>
-          <a:p xmlns:a="http://schemas.openxmlformats.org/drawingml/2006/main">
-            <a:r>
-              <a:t>Keep the restore isolated from the original project. The original data should remain available while you inspect the restored target. Use the course's platform-appropriate recovery material, and state honestly which steps you executed and which remain a plan. The clinic is an opportunity to replace one uncertain recovery claim with a checked result.</a:t>
-            </a:r>
-          </a:p>
-          <a:p xmlns:a="http://schemas.openxmlformats.org/drawingml/2006/main">
-            <a:r>
-              <a:t/>
-            </a:r>
-          </a:p>
+              <a:t>Recovery next. Read the title: a restore test answers more than a backup command. A backup command tells you a file was created. It does not tell you what is in it, or whether you can get a working database back from it.</a:t>
+            </a:r>
+          </a:p>
+          <a:p xmlns:a="http://schemas.openxmlformats.org/drawingml/2006/main"/>
+          <a:p xmlns:a="http://schemas.openxmlformats.org/drawingml/2006/main">
+            <a:r>
+              <a:t>Look at the table. Each row is something you observe in an isolated restore target, a separate place, not your original project. First, expected IDs and selected field values. That checks the data survived in the expected form. Remember slide 20: matching counts alone can hide missing and wrong records. Second, a familiar query returns its expected answer. That checks the restored data actually supports something the application does.</a:t>
+            </a:r>
+          </a:p>
+          <a:p xmlns:a="http://schemas.openxmlformats.org/drawingml/2006/main"/>
+          <a:p xmlns:a="http://schemas.openxmlformats.org/drawingml/2006/main">
+            <a:r>
+              <a:t>Third, inspect indexes, constraints, and access. Read the bottom box: a CSV or JSON export alone does not recreate every database object. You do not get the indexes, validators, roles, or policies. If something needs a separate step to recreate, write that step in your project guide.</a:t>
+            </a:r>
+          </a:p>
+          <a:p xmlns:a="http://schemas.openxmlformats.org/drawingml/2006/main"/>
+          <a:p xmlns:a="http://schemas.openxmlformats.org/drawingml/2006/main">
+            <a:r>
+              <a:t>Fourth, record the restore command and the elapsed time. That describes one run under those conditions. It is not a promise about recovery time under a bigger workload during a real incident.</a:t>
+            </a:r>
+          </a:p>
+          <a:p xmlns:a="http://schemas.openxmlformats.org/drawingml/2006/main"/>
+          <a:p xmlns:a="http://schemas.openxmlformats.org/drawingml/2006/main">
+            <a:r>
+              <a:t>Keep the restore isolated so the original data stays available while you inspect it. Use the recovery approach that fits your platform and artifact. And be honest about which steps you actually ran and which are still a plan. Today is a good day to turn one recovery claim into a checked result.</a:t>
+            </a:r>
+          </a:p>
+          <a:p xmlns:a="http://schemas.openxmlformats.org/drawingml/2006/main"/>
           <a:p xmlns:a="http://schemas.openxmlformats.org/drawingml/2006/main">
             <a:r>
               <a:t>[Sources]</a:t>
@@ -2722,44 +2566,40 @@
           <a:lstStyle xmlns:a="http://schemas.openxmlformats.org/drawingml/2006/main"/>
           <a:p xmlns:a="http://schemas.openxmlformats.org/drawingml/2006/main">
             <a:r>
-              <a:t>A two-store system needs a recovery order based on ownership. If MongoDB contains only a rebuildable resident projection of PostgreSQL-owned facts, we may restore the authoritative source in isolation and reconstruct the projection from that verified source. We then compare the candidate's identifiers and owned values before coordinating access.</a:t>
-            </a:r>
-          </a:p>
-          <a:p xmlns:a="http://schemas.openxmlformats.org/drawingml/2006/main">
-            <a:r>
-              <a:t/>
-            </a:r>
-          </a:p>
-          <a:p xmlns:a="http://schemas.openxmlformats.org/drawingml/2006/main">
-            <a:r>
-              <a:t>That approach is different from blindly restoring two independent dumps and declaring the application consistent. A PostgreSQL dump taken before a status update and a MongoDB dump taken afterward can represent different application moments. Each artifact may be internally useful while their combination disagrees.</a:t>
-            </a:r>
-          </a:p>
-          <a:p xmlns:a="http://schemas.openxmlformats.org/drawingml/2006/main">
-            <a:r>
-              <a:t/>
-            </a:r>
-          </a:p>
-          <a:p xmlns:a="http://schemas.openxmlformats.org/drawingml/2006/main">
-            <a:r>
-              <a:t>Ownership changes the procedure. If a MongoDB collection contains independent historical events or annotations that PostgreSQL does not own, those records need their own recovery source. Rebuilding only from the relational ticket table would lose information. Similarly, a current source snapshot cannot necessarily recreate a historical state that the application promised to preserve.</a:t>
-            </a:r>
-          </a:p>
-          <a:p xmlns:a="http://schemas.openxmlformats.org/drawingml/2006/main">
-            <a:r>
-              <a:t/>
-            </a:r>
-          </a:p>
-          <a:p xmlns:a="http://schemas.openxmlformats.org/drawingml/2006/main">
-            <a:r>
-              <a:t>The clinic does not require you to turn a one-database project into a two-database project. If you chose one platform, explain its recovery boundary clearly. If you chose both, explain what each owns and how recovery respects that split. The useful professional skill is being able to identify which data can be reconstructed, which data must be preserved independently, and which checks are needed before users return. More backup files do not eliminate the need for that reasoning.</a:t>
-            </a:r>
-          </a:p>
-          <a:p xmlns:a="http://schemas.openxmlformats.org/drawingml/2006/main">
-            <a:r>
-              <a:t/>
-            </a:r>
-          </a:p>
+              <a:t>If you have two stores, recovery needs an order, and the order comes from ownership. Read the first box.</a:t>
+            </a:r>
+          </a:p>
+          <a:p xmlns:a="http://schemas.openxmlformats.org/drawingml/2006/main"/>
+          <a:p xmlns:a="http://schemas.openxmlformats.org/drawingml/2006/main">
+            <a:r>
+              <a:t>For a rebuildable resident projection, like our MongoDB copy of PostgreSQL-owned status, the order is: restore the authoritative source in isolation, reconstruct the source-owned projection fields from it, compare IDs and values, and only then coordinate access. That is the same direction as Day 1's repair. Authority first, copy second.</a:t>
+            </a:r>
+          </a:p>
+          <a:p xmlns:a="http://schemas.openxmlformats.org/drawingml/2006/main"/>
+          <a:p xmlns:a="http://schemas.openxmlformats.org/drawingml/2006/main">
+            <a:r>
+              <a:t>Now, why not just restore both dumps? Read the second box. Two dumps from different times do not automatically represent one application-consistent point. If the PostgreSQL dump was taken before a status update and the MongoDB dump after it, each file is fine on its own, and together they disagree.</a:t>
+            </a:r>
+          </a:p>
+          <a:p xmlns:a="http://schemas.openxmlformats.org/drawingml/2006/main"/>
+          <a:p xmlns:a="http://schemas.openxmlformats.org/drawingml/2006/main">
+            <a:r>
+              <a:t>The box also says a MongoDB collection with independent historical facts needs its own recovery source. If MongoDB holds history or annotations that PostgreSQL never owned, rebuilding from the ticket table loses them. You cannot reconstruct what the source never had.</a:t>
+            </a:r>
+          </a:p>
+          <a:p xmlns:a="http://schemas.openxmlformats.org/drawingml/2006/main"/>
+          <a:p xmlns:a="http://schemas.openxmlformats.org/drawingml/2006/main">
+            <a:r>
+              <a:t>So, for your project: you do not need to turn a one-database project into a two-database project. If you chose one platform, explain its recovery boundary. If you chose both, explain what each owns and how your recovery respects that split.</a:t>
+            </a:r>
+          </a:p>
+          <a:p xmlns:a="http://schemas.openxmlformats.org/drawingml/2006/main"/>
+          <a:p xmlns:a="http://schemas.openxmlformats.org/drawingml/2006/main">
+            <a:r>
+              <a:t>The skill here is knowing which data can be rebuilt, which must be preserved independently, and what you check before users come back. More backup files do not replace that reasoning.</a:t>
+            </a:r>
+          </a:p>
+          <a:p xmlns:a="http://schemas.openxmlformats.org/drawingml/2006/main"/>
           <a:p xmlns:a="http://schemas.openxmlformats.org/drawingml/2006/main">
             <a:r>
               <a:t>[Sources]</a:t>
@@ -2837,44 +2677,46 @@
           <a:lstStyle xmlns:a="http://schemas.openxmlformats.org/drawingml/2006/main"/>
           <a:p xmlns:a="http://schemas.openxmlformats.org/drawingml/2006/main">
             <a:r>
-              <a:t>A demonstration becomes easier to follow when each result is connected to an input and a question. Show one useful query, explain what one returned row or document represents, and state the expected answer for the data you loaded. That gives the audience a way to understand correctness rather than simply watching a command finish.</a:t>
-            </a:r>
-          </a:p>
-          <a:p xmlns:a="http://schemas.openxmlformats.org/drawingml/2006/main">
-            <a:r>
-              <a:t/>
-            </a:r>
-          </a:p>
-          <a:p xmlns:a="http://schemas.openxmlformats.org/drawingml/2006/main">
-            <a:r>
-              <a:t>Then show an operational decision. It could be an index comparison, an expected permission denial, or a separate restore check. Explain the mechanism and the observed result. If the experiment has a limitation, include it where it affects the conclusion instead of hiding it in a vague final disclaimer.</a:t>
-            </a:r>
-          </a:p>
-          <a:p xmlns:a="http://schemas.openxmlformats.org/drawingml/2006/main">
-            <a:r>
-              <a:t/>
-            </a:r>
-          </a:p>
-          <a:p xmlns:a="http://schemas.openxmlformats.org/drawingml/2006/main">
-            <a:r>
-              <a:t>Prepare a saved result for a cloud-dependent step. Label when and where it ran. If the current connection fails, you can show that result while explaining that it is a prior run. It does not become a live result merely because it appears beside the command in a notebook.</a:t>
-            </a:r>
-          </a:p>
-          <a:p xmlns:a="http://schemas.openxmlformats.org/drawingml/2006/main">
-            <a:r>
-              <a:t/>
-            </a:r>
-          </a:p>
-          <a:p xmlns:a="http://schemas.openxmlformats.org/drawingml/2006/main">
-            <a:r>
-              <a:t>The final-project assignment permits a demonstration directly from the notebook or code and results. A separate slide deck is optional. Keep credentials out of both the live view and saved output. An understandable demonstration is not the same as a perfectly smooth demonstration. Being able to diagnose a current failure, explain a previous checked result, and identify what you would test next can still show substantial command of the system you built.</a:t>
-            </a:r>
-          </a:p>
-          <a:p xmlns:a="http://schemas.openxmlformats.org/drawingml/2006/main">
-            <a:r>
-              <a:t/>
-            </a:r>
-          </a:p>
+              <a:t>Now the demonstration. The question is whether another person can follow it. Look at the table, Show on the left, Explain on the right.</a:t>
+            </a:r>
+          </a:p>
+          <a:p xmlns:a="http://schemas.openxmlformats.org/drawingml/2006/main"/>
+          <a:p xmlns:a="http://schemas.openxmlformats.org/drawingml/2006/main">
+            <a:r>
+              <a:t>First, show one query with its input and result, and explain the question, what a returned row or document means, and the expected answer for your data. That lets the audience judge correctness instead of just watching a command finish.</a:t>
+            </a:r>
+          </a:p>
+          <a:p xmlns:a="http://schemas.openxmlformats.org/drawingml/2006/main"/>
+          <a:p xmlns:a="http://schemas.openxmlformats.org/drawingml/2006/main">
+            <a:r>
+              <a:t>Second, one operational decision. That could be an index comparison, an expected permission denial, or a separate restore check. Explain what you tested and what changed.</a:t>
+            </a:r>
+          </a:p>
+          <a:p xmlns:a="http://schemas.openxmlformats.org/drawingml/2006/main"/>
+          <a:p xmlns:a="http://schemas.openxmlformats.org/drawingml/2006/main">
+            <a:r>
+              <a:t>Third, a failure or limitation, and how you detected it. Put the limitation where it affects the conclusion, not in a vague disclaimer at the very end.</a:t>
+            </a:r>
+          </a:p>
+          <a:p xmlns:a="http://schemas.openxmlformats.org/drawingml/2006/main"/>
+          <a:p xmlns:a="http://schemas.openxmlformats.org/drawingml/2006/main">
+            <a:r>
+              <a:t>Fourth, a saved result in case the cloud connection fails. Label when and where it ran. If the live connection breaks during your demo, you can show that result and say plainly that it is a prior run. It does not become a live result just because it sits next to the command.</a:t>
+            </a:r>
+          </a:p>
+          <a:p xmlns:a="http://schemas.openxmlformats.org/drawingml/2006/main"/>
+          <a:p xmlns:a="http://schemas.openxmlformats.org/drawingml/2006/main">
+            <a:r>
+              <a:t>Read the bottom box. The notebook or script can be the presentation. A second slide deck is optional in the final-project assignment. Keep credentials off the screen and out of saved output.</a:t>
+            </a:r>
+          </a:p>
+          <a:p xmlns:a="http://schemas.openxmlformats.org/drawingml/2006/main"/>
+          <a:p xmlns:a="http://schemas.openxmlformats.org/drawingml/2006/main">
+            <a:r>
+              <a:t>And a smooth demo is not the same as a good one. If something breaks and you can diagnose it, show a previous checked result, and say what you would test next, that shows real command of your system.</a:t>
+            </a:r>
+          </a:p>
+          <a:p xmlns:a="http://schemas.openxmlformats.org/drawingml/2006/main"/>
           <a:p xmlns:a="http://schemas.openxmlformats.org/drawingml/2006/main">
             <a:r>
               <a:t>[Sources]</a:t>
@@ -2952,44 +2794,40 @@
           <a:lstStyle xmlns:a="http://schemas.openxmlformats.org/drawingml/2006/main"/>
           <a:p xmlns:a="http://schemas.openxmlformats.org/drawingml/2006/main">
             <a:r>
-              <a:t>Use the final-project assignment and rubric as the source of requirements. Open the package you have already been building and identify the unfinished item most likely to prevent you from explaining or verifying the system. That item should be specific enough to work on during this class.</a:t>
-            </a:r>
-          </a:p>
-          <a:p xmlns:a="http://schemas.openxmlformats.org/drawingml/2006/main">
-            <a:r>
-              <a:t/>
-            </a:r>
-          </a:p>
-          <a:p xmlns:a="http://schemas.openxmlformats.org/drawingml/2006/main">
-            <a:r>
-              <a:t>For example, a query may return the wrong unit of analysis after a join. An index decision may lack the query it supports. An access explanation may show only an administrator's successful read. A recovery guide may stop after creating the backup file. Each gap suggests a different next action, so avoid treating the clinic as a generic instruction to add more features.</a:t>
-            </a:r>
-          </a:p>
-          <a:p xmlns:a="http://schemas.openxmlformats.org/drawingml/2006/main">
-            <a:r>
-              <a:t/>
-            </a:r>
-          </a:p>
-          <a:p xmlns:a="http://schemas.openxmlformats.org/drawingml/2006/main">
-            <a:r>
-              <a:t>Complete and check the chosen item inside the same notebook, script, or project guide. If you discover a dependency, such as needing correct seed data before evaluating the query, address that dependency first. Record the actual result and the remaining limitation in the guide you already maintain.</a:t>
-            </a:r>
-          </a:p>
-          <a:p xmlns:a="http://schemas.openxmlformats.org/drawingml/2006/main">
-            <a:r>
-              <a:t/>
-            </a:r>
-          </a:p>
-          <a:p xmlns:a="http://schemas.openxmlformats.org/drawingml/2006/main">
-            <a:r>
-              <a:t>This remains individual work. There is no separate Week fourteen project submission, and the platform choices remain unchanged. A small one-platform project with coherent queries and operations can meet the assignment without a second database or a web application. By the end of the clinic, the important outcome is a concrete improvement to your existing project and a clear explanation of the next remaining issue, rather than a new collection of overlapping documents.</a:t>
-            </a:r>
-          </a:p>
-          <a:p xmlns:a="http://schemas.openxmlformats.org/drawingml/2006/main">
-            <a:r>
-              <a:t/>
-            </a:r>
-          </a:p>
+              <a:t>Here is what you do for the rest of class. There are three steps on the slide.</a:t>
+            </a:r>
+          </a:p>
+          <a:p xmlns:a="http://schemas.openxmlformats.org/drawingml/2006/main"/>
+          <a:p xmlns:a="http://schemas.openxmlformats.org/drawingml/2006/main">
+            <a:r>
+              <a:t>Open the final-project assignment and your existing package. Choose the highest-risk unfinished item in the rubric. That means the item most likely to stop you from explaining or verifying your system. Make it specific enough to finish today.</a:t>
+            </a:r>
+          </a:p>
+          <a:p xmlns:a="http://schemas.openxmlformats.org/drawingml/2006/main"/>
+          <a:p xmlns:a="http://schemas.openxmlformats.org/drawingml/2006/main">
+            <a:r>
+              <a:t>For example: a query that returns the wrong unit of analysis after a join. An index explanation without the query it supports. An access section that only shows an administrator's successful read. A recovery guide that stops right after making the backup file. Each of those needs a different next action, so do not treat today as a reason to add more features.</a:t>
+            </a:r>
+          </a:p>
+          <a:p xmlns:a="http://schemas.openxmlformats.org/drawingml/2006/main"/>
+          <a:p xmlns:a="http://schemas.openxmlformats.org/drawingml/2006/main">
+            <a:r>
+              <a:t>Then complete and check that item in the same notebook, code, or guide. If you hit a dependency, say you need correct seed data before the query can be evaluated, fix the dependency first. Record the actual result and the remaining limitation in the guide you already have.</a:t>
+            </a:r>
+          </a:p>
+          <a:p xmlns:a="http://schemas.openxmlformats.org/drawingml/2006/main"/>
+          <a:p xmlns:a="http://schemas.openxmlformats.org/drawingml/2006/main">
+            <a:r>
+              <a:t>Read the bottom box. Possible work includes a query correction, a permission test, an index comparison, or a separate restore check. A one-platform project remains a valid choice. And there is no separate Week 14 project submission.</a:t>
+            </a:r>
+          </a:p>
+          <a:p xmlns:a="http://schemas.openxmlformats.org/drawingml/2006/main"/>
+          <a:p xmlns:a="http://schemas.openxmlformats.org/drawingml/2006/main">
+            <a:r>
+              <a:t>This is individual work. By the end of class, you want one concrete improvement to your project and a clear sentence about what comes next, not a new pile of overlapping documents.</a:t>
+            </a:r>
+          </a:p>
+          <a:p xmlns:a="http://schemas.openxmlformats.org/drawingml/2006/main"/>
           <a:p xmlns:a="http://schemas.openxmlformats.org/drawingml/2006/main">
             <a:r>
               <a:t>[Sources]</a:t>
@@ -3067,44 +2905,34 @@
           <a:lstStyle xmlns:a="http://schemas.openxmlformats.org/drawingml/2006/main"/>
           <a:p xmlns:a="http://schemas.openxmlformats.org/drawingml/2006/main">
             <a:r>
-              <a:t>Consider an application that sends two ordinary database writes. It first commits the staff update in PostgreSQL. It then tries to update the MongoDB document. If the second action fails, the first action has already changed durable state. Returning an error message to the browser does not travel backward in time and undo that committed transaction.</a:t>
-            </a:r>
-          </a:p>
-          <a:p xmlns:a="http://schemas.openxmlformats.org/drawingml/2006/main">
-            <a:r>
-              <a:t/>
-            </a:r>
-          </a:p>
-          <a:p xmlns:a="http://schemas.openxmlformats.org/drawingml/2006/main">
-            <a:r>
-              <a:t>The important boundary is between the two operations. A PostgreSQL transaction can coordinate its own participating statements. A separate network call to MongoDB does not automatically join that transaction simply because the calls appear next to each other in Python. Reversing their order leaves the same category of problem, with the other store potentially changing first.</a:t>
-            </a:r>
-          </a:p>
-          <a:p xmlns:a="http://schemas.openxmlformats.org/drawingml/2006/main">
-            <a:r>
-              <a:t/>
-            </a:r>
-          </a:p>
-          <a:p xmlns:a="http://schemas.openxmlformats.org/drawingml/2006/main">
-            <a:r>
-              <a:t>This does not mean every integration must use one particular architecture. Some systems coordinate distributed transactions, some use compensating business operations, and some accept asynchronous copies. Each approach has requirements and costs. Our class example uses a transactional outbox because it lets us connect a familiar local transaction to a recorded integration event.</a:t>
-            </a:r>
-          </a:p>
-          <a:p xmlns:a="http://schemas.openxmlformats.org/drawingml/2006/main">
-            <a:r>
-              <a:t/>
-            </a:r>
-          </a:p>
-          <a:p xmlns:a="http://schemas.openxmlformats.org/drawingml/2006/main">
-            <a:r>
-              <a:t>Before that solution, retain the failure model. The application can know that the source committed while still being uncertain about the second write. An error handler should preserve the operation identifier and the known outcome. Silently retrying both writes as if nothing happened may repeat an effect. We need a repair path that understands already-accepted work.</a:t>
-            </a:r>
-          </a:p>
-          <a:p xmlns:a="http://schemas.openxmlformats.org/drawingml/2006/main">
-            <a:r>
-              <a:t/>
-            </a:r>
-          </a:p>
+              <a:t>Let's look at the most obvious way to keep two stores in sync, and why it breaks. Read the table from top to bottom.</a:t>
+            </a:r>
+          </a:p>
+          <a:p xmlns:a="http://schemas.openxmlformats.org/drawingml/2006/main"/>
+          <a:p xmlns:a="http://schemas.openxmlformats.org/drawingml/2006/main">
+            <a:r>
+              <a:t>The application commits the staff update in PostgreSQL. The source now says resolved, version 17. Then it sends the update to MongoDB, and the connection fails or the client times out. So the application returns an error to the browser. But look at the third row. The committed PostgreSQL update still exists. An error message to the browser does not travel back in time and undo a commit.</a:t>
+            </a:r>
+          </a:p>
+          <a:p xmlns:a="http://schemas.openxmlformats.org/drawingml/2006/main"/>
+          <a:p xmlns:a="http://schemas.openxmlformats.org/drawingml/2006/main">
+            <a:r>
+              <a:t>Why can't one transaction cover both? Because a PostgreSQL transaction coordinates PostgreSQL statements. A network call to MongoDB does not join that transaction just because the two lines sit next to each other in your Python. And the box at the bottom says flipping the order does not help. Write MongoDB first, and now the copy can change while the source never does. Same problem, other side.</a:t>
+            </a:r>
+          </a:p>
+          <a:p xmlns:a="http://schemas.openxmlformats.org/drawingml/2006/main"/>
+          <a:p xmlns:a="http://schemas.openxmlformats.org/drawingml/2006/main">
+            <a:r>
+              <a:t>There are several real answers to this: distributed transactions, compensating operations, or simply accepting an asynchronous copy. Each one has costs. We are going to use a transactional outbox, because it builds on a local transaction you already understand.</a:t>
+            </a:r>
+          </a:p>
+          <a:p xmlns:a="http://schemas.openxmlformats.org/drawingml/2006/main"/>
+          <a:p xmlns:a="http://schemas.openxmlformats.org/drawingml/2006/main">
+            <a:r>
+              <a:t>Before we get there, hold on to the failure model. The source committed. The second write is uncertain. Blindly retrying both writes could repeat an effect.</a:t>
+            </a:r>
+          </a:p>
+          <a:p xmlns:a="http://schemas.openxmlformats.org/drawingml/2006/main"/>
           <a:p xmlns:a="http://schemas.openxmlformats.org/drawingml/2006/main">
             <a:r>
               <a:t>[Sources]</a:t>
@@ -3187,44 +3015,40 @@
           <a:lstStyle xmlns:a="http://schemas.openxmlformats.org/drawingml/2006/main"/>
           <a:p xmlns:a="http://schemas.openxmlformats.org/drawingml/2006/main">
             <a:r>
-              <a:t>This example of interview language begins by naming the setting accurately: a class experiment. It then identifies the problem, the investigation, and the checks performed. That is more informative than claiming broad experience with distributed databases after running a single notebook.</a:t>
-            </a:r>
-          </a:p>
-          <a:p xmlns:a="http://schemas.openxmlformats.org/drawingml/2006/main">
-            <a:r>
-              <a:t/>
-            </a:r>
-          </a:p>
-          <a:p xmlns:a="http://schemas.openxmlformats.org/drawingml/2006/main">
-            <a:r>
-              <a:t>You can explain that the resident view was stale, that you traced the accepted version through the incident record, and that you tested how duplicate and delayed complete-state events affect a projection. The broken and repaired results give you something specific to discuss. The reconciliation example adds a second insight: equal counts can conceal missing identifiers and wrong field values.</a:t>
-            </a:r>
-          </a:p>
-          <a:p xmlns:a="http://schemas.openxmlformats.org/drawingml/2006/main">
-            <a:r>
-              <a:t/>
-            </a:r>
-          </a:p>
-          <a:p xmlns:a="http://schemas.openxmlformats.org/drawingml/2006/main">
-            <a:r>
-              <a:t>The limits are part of the explanation. Your local dictionary loop did not operate a production queue, coordinate concurrent workers, or perform a live cutover. You can still explain why a production MongoDB update needs the version condition inside its atomic operation and why independently owned data changes the recovery plan.</a:t>
-            </a:r>
-          </a:p>
-          <a:p xmlns:a="http://schemas.openxmlformats.org/drawingml/2006/main">
-            <a:r>
-              <a:t/>
-            </a:r>
-          </a:p>
-          <a:p xmlns:a="http://schemas.openxmlformats.org/drawingml/2006/main">
-            <a:r>
-              <a:t>When translating your own final project, use the same pattern of concrete problem, implemented mechanism, observed result, and remaining boundary. Choose examples you can explain at the level of the actual code and data. Next week we will bring the course together through review, project demonstrations, and career explanations. The goal is to make the database decisions you have practiced understandable to another person, including when that person asks what failed or what you would change next.</a:t>
-            </a:r>
-          </a:p>
-          <a:p xmlns:a="http://schemas.openxmlformats.org/drawingml/2006/main">
-            <a:r>
-              <a:t/>
-            </a:r>
-          </a:p>
+              <a:t>Last slide for the week, and it is about how you talk about this work. Read the paragraph in the box.</a:t>
+            </a:r>
+          </a:p>
+          <a:p xmlns:a="http://schemas.openxmlformats.org/drawingml/2006/main"/>
+          <a:p xmlns:a="http://schemas.openxmlformats.org/drawingml/2006/main">
+            <a:r>
+              <a:t>It starts with the setting: in a class experiment. That is honest, and honest is more convincing than claiming distributed-database experience after one notebook. Then it names the problem, a stale resident view traced to a paused consumer. Then what was tested: duplicate and delayed full-state events. Then the comparison: IDs and values across the source and the projection. And then what was learned: why a version guard matters, and why matching record counts alone can miss corruption.</a:t>
+            </a:r>
+          </a:p>
+          <a:p xmlns:a="http://schemas.openxmlformats.org/drawingml/2006/main"/>
+          <a:p xmlns:a="http://schemas.openxmlformats.org/drawingml/2006/main">
+            <a:r>
+              <a:t>That pattern works for anything. A concrete problem, the mechanism you built, the result you observed, and the boundary of what you showed.</a:t>
+            </a:r>
+          </a:p>
+          <a:p xmlns:a="http://schemas.openxmlformats.org/drawingml/2006/main"/>
+          <a:p xmlns:a="http://schemas.openxmlformats.org/drawingml/2006/main">
+            <a:r>
+              <a:t>Read the bottom box. Describe the work you actually ran. The local notebook does not establish experience operating a distributed production service. You did not run a production queue, coordinate concurrent workers, or do a live cutover. But you can still explain why a production MongoDB update needs the version check inside the atomic operation, and why independently owned data changes the recovery plan. Interviewers value that kind of precision.</a:t>
+            </a:r>
+          </a:p>
+          <a:p xmlns:a="http://schemas.openxmlformats.org/drawingml/2006/main"/>
+          <a:p xmlns:a="http://schemas.openxmlformats.org/drawingml/2006/main">
+            <a:r>
+              <a:t>Use the same pattern for your final project. Pick examples you can explain down to the code and the data.</a:t>
+            </a:r>
+          </a:p>
+          <a:p xmlns:a="http://schemas.openxmlformats.org/drawingml/2006/main"/>
+          <a:p xmlns:a="http://schemas.openxmlformats.org/drawingml/2006/main">
+            <a:r>
+              <a:t>Next week is course review, final demonstrations, and career explanations. The goal is that you can make your database decisions clear to another person, including when they ask you what failed.</a:t>
+            </a:r>
+          </a:p>
+          <a:p xmlns:a="http://schemas.openxmlformats.org/drawingml/2006/main"/>
           <a:p xmlns:a="http://schemas.openxmlformats.org/drawingml/2006/main">
             <a:r>
               <a:t>[Sources]</a:t>
@@ -3372,44 +3196,28 @@
           <a:lstStyle xmlns:a="http://schemas.openxmlformats.org/drawingml/2006/main"/>
           <a:p xmlns:a="http://schemas.openxmlformats.org/drawingml/2006/main">
             <a:r>
-              <a:t>A timeout describes an observation by the client. It tells us that the client did not obtain a suitable response before its deadline. It does not, by itself, tell us exactly what happened inside the remote database.</a:t>
-            </a:r>
-          </a:p>
-          <a:p xmlns:a="http://schemas.openxmlformats.org/drawingml/2006/main">
-            <a:r>
-              <a:t/>
-            </a:r>
-          </a:p>
-          <a:p xmlns:a="http://schemas.openxmlformats.org/drawingml/2006/main">
-            <a:r>
-              <a:t>In the first row, the request never arrives, so no remote write takes place. In the second row, the server applies the write but the response is lost or delayed. The client can see a timeout in either case. Those two histories require different interpretations, even though the exception message can look similar.</a:t>
-            </a:r>
-          </a:p>
-          <a:p xmlns:a="http://schemas.openxmlformats.org/drawingml/2006/main">
-            <a:r>
-              <a:t/>
-            </a:r>
-          </a:p>
-          <a:p xmlns:a="http://schemas.openxmlformats.org/drawingml/2006/main">
-            <a:r>
-              <a:t>That is why our investigation uses stable identifiers and a subsequent record comparison. We look for the particular ticket and event rather than assuming every timeout means a failed write. In the supplied incident, a later MongoDB read still shows version sixteen. That later observation establishes that this projection is behind the source version seventeen. The timeout alone would have been weaker information.</a:t>
-            </a:r>
-          </a:p>
-          <a:p xmlns:a="http://schemas.openxmlformats.org/drawingml/2006/main">
-            <a:r>
-              <a:t/>
-            </a:r>
-          </a:p>
-          <a:p xmlns:a="http://schemas.openxmlformats.org/drawingml/2006/main">
-            <a:r>
-              <a:t>Safe retries must tolerate the possibility that an earlier attempt already applied. Setting a field to an intended value can be repeat-safe under a suitable ordering policy. Incrementing a counter again can create an extra effect. A production design also needs to consider the read's consistency and whether a newer event arrived meanwhile. We will keep those limits explicit while using a small, understandable experiment.</a:t>
-            </a:r>
-          </a:p>
-          <a:p xmlns:a="http://schemas.openxmlformats.org/drawingml/2006/main">
-            <a:r>
-              <a:t/>
-            </a:r>
-          </a:p>
+              <a:t>This slide is about one word that misleads people constantly: timeout.</a:t>
+            </a:r>
+          </a:p>
+          <a:p xmlns:a="http://schemas.openxmlformats.org/drawingml/2006/main"/>
+          <a:p xmlns:a="http://schemas.openxmlformats.org/drawingml/2006/main">
+            <a:r>
+              <a:t>A timeout is something the client observed. It means the client did not get a reply before its deadline. That is all it means. Look at the two rows. In the first, the request never reached the server, so nothing was written. In the second, the server applied the write and the reply got lost on the way back. Now look at the right-hand column. The client sees exactly the same thing in both cases: no reply before the timeout. Two different histories, one identical error.</a:t>
+            </a:r>
+          </a:p>
+          <a:p xmlns:a="http://schemas.openxmlformats.org/drawingml/2006/main"/>
+          <a:p xmlns:a="http://schemas.openxmlformats.org/drawingml/2006/main">
+            <a:r>
+              <a:t>So a timeout cannot tell you the stored outcome. That is why the box at the bottom says read the relevant record and correlate the event ID. In our supplied incident, a later MongoDB read still shows version 16 while the source is at 17. That later read is what establishes that the projection is behind. The timeout alone was much weaker evidence.</a:t>
+            </a:r>
+          </a:p>
+          <a:p xmlns:a="http://schemas.openxmlformats.org/drawingml/2006/main"/>
+          <a:p xmlns:a="http://schemas.openxmlformats.org/drawingml/2006/main">
+            <a:r>
+              <a:t>The second line in the box is the design lesson. A retry has to be safe even if the first attempt already applied. Setting a field to a value can be safe to repeat, as long as there is an ordering rule. Adding one to a counter is not, because you get two increments. Keep that difference in mind, because it comes back on slide 11.</a:t>
+            </a:r>
+          </a:p>
+          <a:p xmlns:a="http://schemas.openxmlformats.org/drawingml/2006/main"/>
           <a:p xmlns:a="http://schemas.openxmlformats.org/drawingml/2006/main">
             <a:r>
               <a:t>[Sources]</a:t>
@@ -3487,44 +3295,40 @@
           <a:lstStyle xmlns:a="http://schemas.openxmlformats.org/drawingml/2006/main"/>
           <a:p xmlns:a="http://schemas.openxmlformats.org/drawingml/2006/main">
             <a:r>
-              <a:t>These three values answer different questions. The ticket identifier tells us which business record we mean. Ticket one thousand eight should refer to the same ticket when it appears in a source row, an event, a consumer log, or a derived document. A shared identifier makes correlation possible, but it does not prove that the records contain the same values.</a:t>
-            </a:r>
-          </a:p>
-          <a:p xmlns:a="http://schemas.openxmlformats.org/drawingml/2006/main">
-            <a:r>
-              <a:t/>
-            </a:r>
-          </a:p>
-          <a:p xmlns:a="http://schemas.openxmlformats.org/drawingml/2006/main">
-            <a:r>
-              <a:t>The event identifier names one recorded change. Event e-v-t, one thousand eight, seventeen is a particular event for that ticket. A retry should preserve that identity rather than inventing a new identity for the same logical change. This allows us to connect repeated delivery attempts to the work they represent.</a:t>
-            </a:r>
-          </a:p>
-          <a:p xmlns:a="http://schemas.openxmlformats.org/drawingml/2006/main">
-            <a:r>
-              <a:t/>
-            </a:r>
-          </a:p>
-          <a:p xmlns:a="http://schemas.openxmlformats.org/drawingml/2006/main">
-            <a:r>
-              <a:t>The source version represents order within this ticket's accepted update sequence. Version eighteen comes after seventeen for ticket one thousand eight. It says nothing about the version sequence of another ticket. It also does not tell us that the consumer received the events in that order.</a:t>
-            </a:r>
-          </a:p>
-          <a:p xmlns:a="http://schemas.openxmlformats.org/drawingml/2006/main">
-            <a:r>
-              <a:t/>
-            </a:r>
-          </a:p>
-          <a:p xmlns:a="http://schemas.openxmlformats.org/drawingml/2006/main">
-            <a:r>
-              <a:t>In our data, versions are positive integers assigned by the source. We assume a single authoritative sequence per ticket. If several writers independently assign conflicting versions, the simple comparison we are about to use is insufficient. Likewise, an event ID alone does not solve ordering. Identity lets us name work, while the version lets us compare the progress represented by complete-state events for the same ticket.</a:t>
-            </a:r>
-          </a:p>
-          <a:p xmlns:a="http://schemas.openxmlformats.org/drawingml/2006/main">
-            <a:r>
-              <a:t/>
-            </a:r>
-          </a:p>
+              <a:t>Three fields, three different questions. Look at the Example column.</a:t>
+            </a:r>
+          </a:p>
+          <a:p xmlns:a="http://schemas.openxmlformats.org/drawingml/2006/main"/>
+          <a:p xmlns:a="http://schemas.openxmlformats.org/drawingml/2006/main">
+            <a:r>
+              <a:t>ticket_id, 1008, answers the question: which business ticket? The same 1008 should appear in the source row, the event, the consumer log, and the resident document. That shared ID is what lets us line the records up. But matching IDs only tell you the records are about the same ticket. They do not tell you the records agree.</a:t>
+            </a:r>
+          </a:p>
+          <a:p xmlns:a="http://schemas.openxmlformats.org/drawingml/2006/main"/>
+          <a:p xmlns:a="http://schemas.openxmlformats.org/drawingml/2006/main">
+            <a:r>
+              <a:t>event_id, evt-1008-17, answers: which recorded change? When something retries, it should keep that same event ID rather than invent a new one. That is how we connect three delivery attempts to the one piece of work they represent.</a:t>
+            </a:r>
+          </a:p>
+          <a:p xmlns:a="http://schemas.openxmlformats.org/drawingml/2006/main"/>
+          <a:p xmlns:a="http://schemas.openxmlformats.org/drawingml/2006/main">
+            <a:r>
+              <a:t>source_version, 17, answers: where does this change sit in this ticket's order? Read the box at the bottom. Version 18 of ticket 1008 follows version 17 of that ticket. It says nothing about any other ticket, and nothing about wall-clock time.</a:t>
+            </a:r>
+          </a:p>
+          <a:p xmlns:a="http://schemas.openxmlformats.org/drawingml/2006/main"/>
+          <a:p xmlns:a="http://schemas.openxmlformats.org/drawingml/2006/main">
+            <a:r>
+              <a:t>A quick note on the numbers. Tickets 1008, 1009, and 1010 in this week's notebook are synthetic. They look like the Metro Support tickets you have used all semester, but they are not those rows, so do not expect the statuses to match.</a:t>
+            </a:r>
+          </a:p>
+          <a:p xmlns:a="http://schemas.openxmlformats.org/drawingml/2006/main"/>
+          <a:p xmlns:a="http://schemas.openxmlformats.org/drawingml/2006/main">
+            <a:r>
+              <a:t>We also assume one authoritative version sequence per ticket. If several writers assign versions independently, the simple comparison we are about to use is not enough.</a:t>
+            </a:r>
+          </a:p>
+          <a:p xmlns:a="http://schemas.openxmlformats.org/drawingml/2006/main"/>
           <a:p xmlns:a="http://schemas.openxmlformats.org/drawingml/2006/main">
             <a:r>
               <a:t>[Sources]</a:t>
@@ -3602,44 +3406,34 @@
           <a:lstStyle xmlns:a="http://schemas.openxmlformats.org/drawingml/2006/main"/>
           <a:p xmlns:a="http://schemas.openxmlformats.org/drawingml/2006/main">
             <a:r>
-              <a:t>The transaction on the left contains two database changes: the business ticket update and an outgoing event row. They commit together. If the transaction rolls back, neither change becomes committed work. This closes the gap in which the source status changes but the application never records that it needs to notify another part of the system.</a:t>
-            </a:r>
-          </a:p>
-          <a:p xmlns:a="http://schemas.openxmlformats.org/drawingml/2006/main">
-            <a:r>
-              <a:t/>
-            </a:r>
-          </a:p>
-          <a:p xmlns:a="http://schemas.openxmlformats.org/drawingml/2006/main">
-            <a:r>
-              <a:t>The outbox is an ordinary table used for this outgoing work. After the transaction commits, a relay reads recorded events and publishes them. A consumer receives those events and updates the resident projection. Relay and consumer describe responsibilities. A small implementation may combine responsibilities in one process, while another architecture may separate them.</a:t>
-            </a:r>
-          </a:p>
-          <a:p xmlns:a="http://schemas.openxmlformats.org/drawingml/2006/main">
-            <a:r>
-              <a:t/>
-            </a:r>
-          </a:p>
-          <a:p xmlns:a="http://schemas.openxmlformats.org/drawingml/2006/main">
-            <a:r>
-              <a:t>The arrows after the transaction still cross failure boundaries. A relay can send an event and stop before recording its acknowledgment. On restart it may send the event again. A consumer can apply a change and lose its acknowledgment. Repeated delivery is therefore a normal possibility that the receiving operation must handle.</a:t>
-            </a:r>
-          </a:p>
-          <a:p xmlns:a="http://schemas.openxmlformats.org/drawingml/2006/main">
-            <a:r>
-              <a:t/>
-            </a:r>
-          </a:p>
-          <a:p xmlns:a="http://schemas.openxmlformats.org/drawingml/2006/main">
-            <a:r>
-              <a:t>The diagram gives us one atomic source boundary followed by retryable delivery. It does not promise immediate cross-store consistency or exactly-once effects throughout the application. We still need stable identity, ordering rules, and checks for stalled progress. The notebook first isolates the local transaction so we can see what that boundary guarantees before reasoning about the separate delivery behavior.</a:t>
-            </a:r>
-          </a:p>
-          <a:p xmlns:a="http://schemas.openxmlformats.org/drawingml/2006/main">
-            <a:r>
-              <a:t/>
-            </a:r>
-          </a:p>
+              <a:t>Here is the pattern we are going to use. Read the diagram from left to right.</a:t>
+            </a:r>
+          </a:p>
+          <a:p xmlns:a="http://schemas.openxmlformats.org/drawingml/2006/main"/>
+          <a:p xmlns:a="http://schemas.openxmlformats.org/drawingml/2006/main">
+            <a:r>
+              <a:t>On the left is PostgreSQL with two things in one transaction: the ticket update and a row in an outbox table. The outbox is just an ordinary table for outgoing work. Because both changes are in one transaction, they commit together or not at all. That closes the gap from slide 3. We can no longer end up with the status changed and no record that anybody needs to be told.</a:t>
+            </a:r>
+          </a:p>
+          <a:p xmlns:a="http://schemas.openxmlformats.org/drawingml/2006/main"/>
+          <a:p xmlns:a="http://schemas.openxmlformats.org/drawingml/2006/main">
+            <a:r>
+              <a:t>After the commit, the relay reads pending events and publishes them. The consumer receives them and makes a version-checked write to MongoDB, the read projection on the right. Relay and consumer are responsibilities. In a small system, one process might do both jobs.</a:t>
+            </a:r>
+          </a:p>
+          <a:p xmlns:a="http://schemas.openxmlformats.org/drawingml/2006/main"/>
+          <a:p xmlns:a="http://schemas.openxmlformats.org/drawingml/2006/main">
+            <a:r>
+              <a:t>Now read the line at the bottom, because it is the honest part. The outbox closes the gap between the source update and the event. Delivery, retries, lag, and reconciliation still remain. Every arrow after the first box crosses a failure boundary. A relay can publish an event and crash before it records that it did, so on restart it publishes again. A consumer can apply a change and lose its acknowledgment. Duplicates are normal.</a:t>
+            </a:r>
+          </a:p>
+          <a:p xmlns:a="http://schemas.openxmlformats.org/drawingml/2006/main"/>
+          <a:p xmlns:a="http://schemas.openxmlformats.org/drawingml/2006/main">
+            <a:r>
+              <a:t>So the outbox gives us one atomic boundary followed by retryable delivery. It does not give us exactly-once behavior anywhere downstream.</a:t>
+            </a:r>
+          </a:p>
+          <a:p xmlns:a="http://schemas.openxmlformats.org/drawingml/2006/main"/>
           <a:p xmlns:a="http://schemas.openxmlformats.org/drawingml/2006/main">
             <a:r>
               <a:t>[Sources]</a:t>
@@ -3722,44 +3516,34 @@
           <a:lstStyle xmlns:a="http://schemas.openxmlformats.org/drawingml/2006/main"/>
           <a:p xmlns:a="http://schemas.openxmlformats.org/drawingml/2006/main">
             <a:r>
-              <a:t>Notebook zero eight has three connected parts. The first creates a small SQLite database inside the Python process. It contains three synthetic tickets and an empty outbox table. SQLite executes real SQL statements and real local transactions. We are using it to observe commit and rollback behavior without requiring a new cloud connection.</a:t>
-            </a:r>
-          </a:p>
-          <a:p xmlns:a="http://schemas.openxmlformats.org/drawingml/2006/main">
-            <a:r>
-              <a:t/>
-            </a:r>
-          </a:p>
-          <a:p xmlns:a="http://schemas.openxmlformats.org/drawingml/2006/main">
-            <a:r>
-              <a:t>The second part uses a Python dictionary as a model of the resident projection. A list of events arrives in a chosen order, and a loop decides which events can change that dictionary. This is deliberately smaller than a deployed MongoDB consumer. It makes the decision rule visible, but it does not simulate network timing, concurrent processes, or durable queue acknowledgments.</a:t>
-            </a:r>
-          </a:p>
-          <a:p xmlns:a="http://schemas.openxmlformats.org/drawingml/2006/main">
-            <a:r>
-              <a:t/>
-            </a:r>
-          </a:p>
-          <a:p xmlns:a="http://schemas.openxmlformats.org/drawingml/2006/main">
-            <a:r>
-              <a:t>The third part compares source identifiers and field values with a wider projection. It reveals why a matching count can conceal missing records and incorrect values. The final cleanup closes the local database. No cloud resources or network access rules are created by this notebook.</a:t>
-            </a:r>
-          </a:p>
-          <a:p xmlns:a="http://schemas.openxmlformats.org/drawingml/2006/main">
-            <a:r>
-              <a:t/>
-            </a:r>
-          </a:p>
-          <a:p xmlns:a="http://schemas.openxmlformats.org/drawingml/2006/main">
-            <a:r>
-              <a:t>The weekly page has an Open in Colab link for the notebook. Choose that link and run the cells in order. Colab requires a Google account and an internet connection, but this notebook does not require an Atlas or Supabase account. The first part supports our shared transaction demonstration, and the delivery experiment is your individual practice. Your submission will be one Brightspace text incident update. The notebook remains working material rather than becoming a second file you must submit.</a:t>
-            </a:r>
-          </a:p>
-          <a:p xmlns:a="http://schemas.openxmlformats.org/drawingml/2006/main">
-            <a:r>
-              <a:t/>
-            </a:r>
-          </a:p>
+              <a:t>Now let's make this concrete. This week's notebook is Notebook 08, Polyglot Incident, and it has three parts. Look at the table.</a:t>
+            </a:r>
+          </a:p>
+          <a:p xmlns:a="http://schemas.openxmlformats.org/drawingml/2006/main"/>
+          <a:p xmlns:a="http://schemas.openxmlformats.org/drawingml/2006/main">
+            <a:r>
+              <a:t>The transaction demonstration creates a small SQLite database inside Python, with three synthetic tickets and an empty outbox table. SQLite runs real SQL and real transactions, so the commits and rollbacks you see are actual commits and rollbacks. We use it because it shows the commit boundary without any new cloud connection.</a:t>
+            </a:r>
+          </a:p>
+          <a:p xmlns:a="http://schemas.openxmlformats.org/drawingml/2006/main"/>
+          <a:p xmlns:a="http://schemas.openxmlformats.org/drawingml/2006/main">
+            <a:r>
+              <a:t>The delivery experiment uses one Python dictionary as a model of the resident copy. A list of events arrives in an order we choose, and a loop decides which ones change the dictionary. It is deliberately tiny. It makes the decision rule visible. It does not simulate network timing or concurrent workers.</a:t>
+            </a:r>
+          </a:p>
+          <a:p xmlns:a="http://schemas.openxmlformats.org/drawingml/2006/main"/>
+          <a:p xmlns:a="http://schemas.openxmlformats.org/drawingml/2006/main">
+            <a:r>
+              <a:t>The reconciliation part compares source IDs and field values against a slightly bigger projection. That is where we will see why matching counts can hide problems.</a:t>
+            </a:r>
+          </a:p>
+          <a:p xmlns:a="http://schemas.openxmlformats.org/drawingml/2006/main"/>
+          <a:p xmlns:a="http://schemas.openxmlformats.org/drawingml/2006/main">
+            <a:r>
+              <a:t>Now read the bottom box. Choose Open in Colab on the weekly page and run the cells in order. No package installation, no cloud database account, no database password. Colab does need a Google sign-in. I will run the first part with you as a demonstration, and the delivery experiment is your individual work. You submit one Brightspace text incident update. The notebook is your working material, not a second file to hand in.</a:t>
+            </a:r>
+          </a:p>
+          <a:p xmlns:a="http://schemas.openxmlformats.org/drawingml/2006/main"/>
           <a:p xmlns:a="http://schemas.openxmlformats.org/drawingml/2006/main">
             <a:r>
               <a:t>[Sources]</a:t>
@@ -3842,44 +3626,40 @@
           <a:lstStyle xmlns:a="http://schemas.openxmlformats.org/drawingml/2006/main"/>
           <a:p xmlns:a="http://schemas.openxmlformats.org/drawingml/2006/main">
             <a:r>
-              <a:t>This excerpt begins after the initialization cell has created the tables and inserted the starting tickets. Ticket one thousand eight initially has status open and source version sixteen. The with block manages the transaction for this SQLite connection.</a:t>
-            </a:r>
-          </a:p>
-          <a:p xmlns:a="http://schemas.openxmlformats.org/drawingml/2006/main">
-            <a:r>
-              <a:t/>
-            </a:r>
-          </a:p>
-          <a:p xmlns:a="http://schemas.openxmlformats.org/drawingml/2006/main">
-            <a:r>
-              <a:t>Inside the block, the update temporarily changes the ticket to resolved at version seventeen. The question marks are parameter placeholders. The tuple supplies the values separately from the SQL statement. We then deliberately raise a RuntimeError before inserting an outbox event. The exception leaves the with block, which causes the pending transaction to roll back. The surrounding except block prints a description after that rollback.</a:t>
-            </a:r>
-          </a:p>
-          <a:p xmlns:a="http://schemas.openxmlformats.org/drawingml/2006/main">
-            <a:r>
-              <a:t/>
-            </a:r>
-          </a:p>
-          <a:p xmlns:a="http://schemas.openxmlformats.org/drawingml/2006/main">
-            <a:r>
-              <a:t>The stored result is therefore open at version sixteen, with zero outbox events. The update statement executed, but the transaction did not commit. That distinction is central to interpreting a log saying that an application reached a particular line of code.</a:t>
-            </a:r>
-          </a:p>
-          <a:p xmlns:a="http://schemas.openxmlformats.org/drawingml/2006/main">
-            <a:r>
-              <a:t/>
-            </a:r>
-          </a:p>
-          <a:p xmlns:a="http://schemas.openxmlformats.org/drawingml/2006/main">
-            <a:r>
-              <a:t>The placement of exception handling matters. If an application catches and suppresses an error inside the transaction block, it may allow the block to exit normally. Here the exception crosses the transaction boundary before we catch it. Also remember that this context manager does not close the connection. The notebook keeps the connection for the next demonstration and closes it explicitly in the cleanup cell. These are SQLite results, not observations from a PostgreSQL server.</a:t>
-            </a:r>
-          </a:p>
-          <a:p xmlns:a="http://schemas.openxmlformats.org/drawingml/2006/main">
-            <a:r>
-              <a:t/>
-            </a:r>
-          </a:p>
+              <a:t>This is the first demonstration, and it is about what an exception does to a transaction.</a:t>
+            </a:r>
+          </a:p>
+          <a:p xmlns:a="http://schemas.openxmlformats.org/drawingml/2006/main"/>
+          <a:p xmlns:a="http://schemas.openxmlformats.org/drawingml/2006/main">
+            <a:r>
+              <a:t>We start right after setup. Ticket 1008 is open, version 16. The line with source_db opens a transaction on this SQLite connection. Inside it, the UPDATE sets the ticket to resolved, version 17. The question marks are placeholders, and the tuple underneath supplies the values separately from the SQL. Then, on purpose, we raise a RuntimeError, before we ever insert the outbox event.</a:t>
+            </a:r>
+          </a:p>
+          <a:p xmlns:a="http://schemas.openxmlformats.org/drawingml/2006/main"/>
+          <a:p xmlns:a="http://schemas.openxmlformats.org/drawingml/2006/main">
+            <a:r>
+              <a:t>Watch where the exception goes. It leaves the with block first, and that is the moment the pending transaction rolls back. Only after that does the except block catch it and print the message.</a:t>
+            </a:r>
+          </a:p>
+          <a:p xmlns:a="http://schemas.openxmlformats.org/drawingml/2006/main"/>
+          <a:p xmlns:a="http://schemas.openxmlformats.org/drawingml/2006/main">
+            <a:r>
+              <a:t>Now look at the result line at the bottom. After fresh setup, ticket 1008 is open, version 16. Outbox rows: 0. The UPDATE statement ran, but it did not commit. That is why a log line saying the application reached a certain line of code does not tell you what got stored.</a:t>
+            </a:r>
+          </a:p>
+          <a:p xmlns:a="http://schemas.openxmlformats.org/drawingml/2006/main"/>
+          <a:p xmlns:a="http://schemas.openxmlformats.org/drawingml/2006/main">
+            <a:r>
+              <a:t>The placement of the try matters. If you catch and swallow the error inside the with block, the block exits normally and commits whatever ran so far. Here the exception crosses the transaction boundary before we catch it.</a:t>
+            </a:r>
+          </a:p>
+          <a:p xmlns:a="http://schemas.openxmlformats.org/drawingml/2006/main"/>
+          <a:p xmlns:a="http://schemas.openxmlformats.org/drawingml/2006/main">
+            <a:r>
+              <a:t>One reminder: this is SQLite in a notebook, not a PostgreSQL server, though the transaction idea is the same.</a:t>
+            </a:r>
+          </a:p>
+          <a:p xmlns:a="http://schemas.openxmlformats.org/drawingml/2006/main"/>
           <a:p xmlns:a="http://schemas.openxmlformats.org/drawingml/2006/main">
             <a:r>
               <a:t>[Sources]</a:t>
@@ -3962,44 +3742,34 @@
           <a:lstStyle xmlns:a="http://schemas.openxmlformats.org/drawingml/2006/main"/>
           <a:p xmlns:a="http://schemas.openxmlformats.org/drawingml/2006/main">
             <a:r>
-              <a:t>This attempt puts both intended writes in one transaction. The update includes the expected starting version in its predicate. It can change ticket one thousand eight from version sixteen to seventeen only while the stored version still equals sixteen.</a:t>
-            </a:r>
-          </a:p>
-          <a:p xmlns:a="http://schemas.openxmlformats.org/drawingml/2006/main">
-            <a:r>
-              <a:t/>
-            </a:r>
-          </a:p>
-          <a:p xmlns:a="http://schemas.openxmlformats.org/drawingml/2006/main">
-            <a:r>
-              <a:t>The cursor's row count tells us whether that transition matched a row. If it matched one row, the next statement inserts the outgoing event. A normal exit from the transaction block commits the ticket change and its event together. The outbox schema also has a unique ticket-and-version pair, so two different event IDs cannot represent the same accepted version in this small example.</a:t>
-            </a:r>
-          </a:p>
-          <a:p xmlns:a="http://schemas.openxmlformats.org/drawingml/2006/main">
-            <a:r>
-              <a:t/>
-            </a:r>
-          </a:p>
-          <a:p xmlns:a="http://schemas.openxmlformats.org/drawingml/2006/main">
-            <a:r>
-              <a:t>If the event insert fails, the transaction rolls back its earlier ticket update. That is the useful guarantee. We are avoiding a committed new source status without its associated outgoing record. The event's presence still does not mean it has been published or applied elsewhere.</a:t>
-            </a:r>
-          </a:p>
-          <a:p xmlns:a="http://schemas.openxmlformats.org/drawingml/2006/main">
-            <a:r>
-              <a:t/>
-            </a:r>
-          </a:p>
-          <a:p xmlns:a="http://schemas.openxmlformats.org/drawingml/2006/main">
-            <a:r>
-              <a:t>Rerunning this successful transition after it has committed no longer matches version sixteen. The complete notebook reports that zero-match case instead of adding another event. A real application must inspect why a conditional update did not match. The row might be absent or another accepted update might have advanced it. Treating every zero match as an identical successful retry would hide those differences. Our fixture is small enough to read the resulting ticket directly.</a:t>
-            </a:r>
-          </a:p>
-          <a:p xmlns:a="http://schemas.openxmlformats.org/drawingml/2006/main">
-            <a:r>
-              <a:t/>
-            </a:r>
-          </a:p>
+              <a:t>Now the success path, with both writes in one transaction.</a:t>
+            </a:r>
+          </a:p>
+          <a:p xmlns:a="http://schemas.openxmlformats.org/drawingml/2006/main"/>
+          <a:p xmlns:a="http://schemas.openxmlformats.org/drawingml/2006/main">
+            <a:r>
+              <a:t>Look at the WHERE clause. It says ticket_id equals 1008 and source_version equals 16. So the update can move the ticket from 16 to 17 only if it is still at 16. That expected-version check is what stops two writers from both claiming the same step.</a:t>
+            </a:r>
+          </a:p>
+          <a:p xmlns:a="http://schemas.openxmlformats.org/drawingml/2006/main"/>
+          <a:p xmlns:a="http://schemas.openxmlformats.org/drawingml/2006/main">
+            <a:r>
+              <a:t>Next line: if changed dot rowcount equals 1. The row count tells us whether the transition actually matched a row. If it did, we insert the outbox event: evt-1008-17, ticket 1008, resolved, version 17. When the with block exits normally, the ticket change and its event commit together.</a:t>
+            </a:r>
+          </a:p>
+          <a:p xmlns:a="http://schemas.openxmlformats.org/drawingml/2006/main"/>
+          <a:p xmlns:a="http://schemas.openxmlformats.org/drawingml/2006/main">
+            <a:r>
+              <a:t>Read the small print at the bottom. A failed event insert rolls back this transaction's ticket update. The outbox also has a unique ticket-and-version pair, so two different event IDs cannot claim the same version. And if the event insert fails for any reason, the ticket update rolls back with it. We never get a new status without its event. But having the event does not mean it has been published or applied anywhere.</a:t>
+            </a:r>
+          </a:p>
+          <a:p xmlns:a="http://schemas.openxmlformats.org/drawingml/2006/main"/>
+          <a:p xmlns:a="http://schemas.openxmlformats.org/drawingml/2006/main">
+            <a:r>
+              <a:t>What if I run this cell again? It no longer matches version 16, so zero rows change, and the complete notebook reports that zero match instead of adding another event. In a real system, find out why. The row might be missing, or another accepted update might have moved it forward.</a:t>
+            </a:r>
+          </a:p>
+          <a:p xmlns:a="http://schemas.openxmlformats.org/drawingml/2006/main"/>
           <a:p xmlns:a="http://schemas.openxmlformats.org/drawingml/2006/main">
             <a:r>
               <a:t>[Sources]</a:t>
